--- a/Presentación_Main_Prediccion_Vuelos_India_V2.pptx
+++ b/Presentación_Main_Prediccion_Vuelos_India_V2.pptx
@@ -208,7 +208,7 @@
           <a:p>
             <a:fld id="{F761DEC6-6FB3-4865-A3D3-04E8FB3FD38B}" type="datetimeFigureOut">
               <a:rPr lang="es-ES" smtClean="0"/>
-              <a:t>04/03/2026</a:t>
+              <a:t>05/03/2026</a:t>
             </a:fld>
             <a:endParaRPr lang="es-ES"/>
           </a:p>
@@ -814,7 +814,7 @@
           <a:p>
             <a:fld id="{4D701304-8143-450A-BAF5-B749BBEA05A9}" type="datetimeFigureOut">
               <a:rPr lang="es-ES" smtClean="0"/>
-              <a:t>04/03/2026</a:t>
+              <a:t>05/03/2026</a:t>
             </a:fld>
             <a:endParaRPr lang="es-ES"/>
           </a:p>
@@ -1012,7 +1012,7 @@
           <a:p>
             <a:fld id="{4D701304-8143-450A-BAF5-B749BBEA05A9}" type="datetimeFigureOut">
               <a:rPr lang="es-ES" smtClean="0"/>
-              <a:t>04/03/2026</a:t>
+              <a:t>05/03/2026</a:t>
             </a:fld>
             <a:endParaRPr lang="es-ES"/>
           </a:p>
@@ -1220,7 +1220,7 @@
           <a:p>
             <a:fld id="{4D701304-8143-450A-BAF5-B749BBEA05A9}" type="datetimeFigureOut">
               <a:rPr lang="es-ES" smtClean="0"/>
-              <a:t>04/03/2026</a:t>
+              <a:t>05/03/2026</a:t>
             </a:fld>
             <a:endParaRPr lang="es-ES"/>
           </a:p>
@@ -1418,7 +1418,7 @@
           <a:p>
             <a:fld id="{4D701304-8143-450A-BAF5-B749BBEA05A9}" type="datetimeFigureOut">
               <a:rPr lang="es-ES" smtClean="0"/>
-              <a:t>04/03/2026</a:t>
+              <a:t>05/03/2026</a:t>
             </a:fld>
             <a:endParaRPr lang="es-ES"/>
           </a:p>
@@ -1693,7 +1693,7 @@
           <a:p>
             <a:fld id="{4D701304-8143-450A-BAF5-B749BBEA05A9}" type="datetimeFigureOut">
               <a:rPr lang="es-ES" smtClean="0"/>
-              <a:t>04/03/2026</a:t>
+              <a:t>05/03/2026</a:t>
             </a:fld>
             <a:endParaRPr lang="es-ES"/>
           </a:p>
@@ -1958,7 +1958,7 @@
           <a:p>
             <a:fld id="{4D701304-8143-450A-BAF5-B749BBEA05A9}" type="datetimeFigureOut">
               <a:rPr lang="es-ES" smtClean="0"/>
-              <a:t>04/03/2026</a:t>
+              <a:t>05/03/2026</a:t>
             </a:fld>
             <a:endParaRPr lang="es-ES"/>
           </a:p>
@@ -2370,7 +2370,7 @@
           <a:p>
             <a:fld id="{4D701304-8143-450A-BAF5-B749BBEA05A9}" type="datetimeFigureOut">
               <a:rPr lang="es-ES" smtClean="0"/>
-              <a:t>04/03/2026</a:t>
+              <a:t>05/03/2026</a:t>
             </a:fld>
             <a:endParaRPr lang="es-ES"/>
           </a:p>
@@ -2511,7 +2511,7 @@
           <a:p>
             <a:fld id="{4D701304-8143-450A-BAF5-B749BBEA05A9}" type="datetimeFigureOut">
               <a:rPr lang="es-ES" smtClean="0"/>
-              <a:t>04/03/2026</a:t>
+              <a:t>05/03/2026</a:t>
             </a:fld>
             <a:endParaRPr lang="es-ES"/>
           </a:p>
@@ -2624,7 +2624,7 @@
           <a:p>
             <a:fld id="{4D701304-8143-450A-BAF5-B749BBEA05A9}" type="datetimeFigureOut">
               <a:rPr lang="es-ES" smtClean="0"/>
-              <a:t>04/03/2026</a:t>
+              <a:t>05/03/2026</a:t>
             </a:fld>
             <a:endParaRPr lang="es-ES"/>
           </a:p>
@@ -2935,7 +2935,7 @@
           <a:p>
             <a:fld id="{4D701304-8143-450A-BAF5-B749BBEA05A9}" type="datetimeFigureOut">
               <a:rPr lang="es-ES" smtClean="0"/>
-              <a:t>04/03/2026</a:t>
+              <a:t>05/03/2026</a:t>
             </a:fld>
             <a:endParaRPr lang="es-ES"/>
           </a:p>
@@ -3223,7 +3223,7 @@
           <a:p>
             <a:fld id="{4D701304-8143-450A-BAF5-B749BBEA05A9}" type="datetimeFigureOut">
               <a:rPr lang="es-ES" smtClean="0"/>
-              <a:t>04/03/2026</a:t>
+              <a:t>05/03/2026</a:t>
             </a:fld>
             <a:endParaRPr lang="es-ES"/>
           </a:p>
@@ -3464,7 +3464,7 @@
           <a:p>
             <a:fld id="{4D701304-8143-450A-BAF5-B749BBEA05A9}" type="datetimeFigureOut">
               <a:rPr lang="es-ES" smtClean="0"/>
-              <a:t>04/03/2026</a:t>
+              <a:t>05/03/2026</a:t>
             </a:fld>
             <a:endParaRPr lang="es-ES"/>
           </a:p>
@@ -3955,162 +3955,6 @@
       </p:grpSpPr>
       <p:sp>
         <p:nvSpPr>
-          <p:cNvPr id="3" name="Marcador de contenido 2">
-            <a:extLst>
-              <a:ext uri="{FF2B5EF4-FFF2-40B4-BE49-F238E27FC236}">
-                <a16:creationId xmlns:a16="http://schemas.microsoft.com/office/drawing/2014/main" id="{9BEE9DF8-EB44-2AC7-187B-85414F242B1A}"/>
-              </a:ext>
-            </a:extLst>
-          </p:cNvPr>
-          <p:cNvSpPr>
-            <a:spLocks noGrp="1"/>
-          </p:cNvSpPr>
-          <p:nvPr>
-            <p:ph idx="1"/>
-          </p:nvPr>
-        </p:nvSpPr>
-        <p:spPr>
-          <a:xfrm>
-            <a:off x="434160" y="1618186"/>
-            <a:ext cx="3404191" cy="2478627"/>
-          </a:xfrm>
-        </p:spPr>
-        <p:txBody>
-          <a:bodyPr wrap="square">
-            <a:spAutoFit/>
-          </a:bodyPr>
-          <a:lstStyle/>
-          <a:p>
-            <a:pPr marL="0" indent="0">
-              <a:buNone/>
-            </a:pPr>
-            <a:r>
-              <a:rPr lang="es-ES" sz="1800" dirty="0"/>
-              <a:t>Optimización bayesiana con los siguientes </a:t>
-            </a:r>
-            <a:r>
-              <a:rPr lang="es-ES" sz="1800" dirty="0" err="1"/>
-              <a:t>hiperparámetros</a:t>
-            </a:r>
-            <a:r>
-              <a:rPr lang="es-ES" sz="1800" dirty="0"/>
-              <a:t>:</a:t>
-            </a:r>
-          </a:p>
-          <a:p>
-            <a:pPr>
-              <a:buFont typeface="Wingdings" panose="05000000000000000000" pitchFamily="2" charset="2"/>
-              <a:buChar char="§"/>
-            </a:pPr>
-            <a:r>
-              <a:rPr lang="es-ES" sz="1800" dirty="0" err="1"/>
-              <a:t>n_estimators</a:t>
-            </a:r>
-            <a:r>
-              <a:rPr lang="es-ES" sz="1800" dirty="0"/>
-              <a:t>":       </a:t>
-            </a:r>
-          </a:p>
-          <a:p>
-            <a:pPr>
-              <a:buFont typeface="Wingdings" panose="05000000000000000000" pitchFamily="2" charset="2"/>
-              <a:buChar char="§"/>
-            </a:pPr>
-            <a:r>
-              <a:rPr lang="es-ES" sz="1800" dirty="0" err="1"/>
-              <a:t>max_depth</a:t>
-            </a:r>
-            <a:r>
-              <a:rPr lang="es-ES" sz="1800" dirty="0"/>
-              <a:t>":</a:t>
-            </a:r>
-          </a:p>
-          <a:p>
-            <a:pPr>
-              <a:buFont typeface="Wingdings" panose="05000000000000000000" pitchFamily="2" charset="2"/>
-              <a:buChar char="§"/>
-            </a:pPr>
-            <a:r>
-              <a:rPr lang="es-ES" sz="1800" dirty="0" err="1"/>
-              <a:t>learning_rate</a:t>
-            </a:r>
-            <a:r>
-              <a:rPr lang="es-ES" sz="1800" dirty="0"/>
-              <a:t>":       </a:t>
-            </a:r>
-          </a:p>
-          <a:p>
-            <a:pPr>
-              <a:buFont typeface="Wingdings" panose="05000000000000000000" pitchFamily="2" charset="2"/>
-              <a:buChar char="§"/>
-            </a:pPr>
-            <a:r>
-              <a:rPr lang="es-ES" sz="1800" dirty="0"/>
-              <a:t> </a:t>
-            </a:r>
-            <a:r>
-              <a:rPr lang="es-ES" sz="1800" dirty="0" err="1"/>
-              <a:t>subsample</a:t>
-            </a:r>
-            <a:r>
-              <a:rPr lang="es-ES" sz="1800" dirty="0"/>
-              <a:t>":       </a:t>
-            </a:r>
-          </a:p>
-          <a:p>
-            <a:pPr>
-              <a:buFont typeface="Wingdings" panose="05000000000000000000" pitchFamily="2" charset="2"/>
-              <a:buChar char="§"/>
-            </a:pPr>
-            <a:r>
-              <a:rPr lang="es-ES" sz="1800" dirty="0" err="1"/>
-              <a:t>colsample_bytree</a:t>
-            </a:r>
-            <a:r>
-              <a:rPr lang="es-ES" sz="1800" dirty="0"/>
-              <a:t>":</a:t>
-            </a:r>
-          </a:p>
-        </p:txBody>
-      </p:sp>
-      <p:pic>
-        <p:nvPicPr>
-          <p:cNvPr id="9" name="Imagen 8">
-            <a:extLst>
-              <a:ext uri="{FF2B5EF4-FFF2-40B4-BE49-F238E27FC236}">
-                <a16:creationId xmlns:a16="http://schemas.microsoft.com/office/drawing/2014/main" id="{F7A219F6-2574-CAC4-CEDE-CA09B2DAED09}"/>
-              </a:ext>
-            </a:extLst>
-          </p:cNvPr>
-          <p:cNvPicPr>
-            <a:picLocks noChangeAspect="1"/>
-          </p:cNvPicPr>
-          <p:nvPr/>
-        </p:nvPicPr>
-        <p:blipFill>
-          <a:blip r:embed="rId3">
-            <a:extLst>
-              <a:ext uri="{28A0092B-C50C-407E-A947-70E740481C1C}">
-                <a14:useLocalDpi xmlns:a14="http://schemas.microsoft.com/office/drawing/2010/main" val="0"/>
-              </a:ext>
-            </a:extLst>
-          </a:blip>
-          <a:stretch>
-            <a:fillRect/>
-          </a:stretch>
-        </p:blipFill>
-        <p:spPr>
-          <a:xfrm>
-            <a:off x="4170686" y="1502924"/>
-            <a:ext cx="4314532" cy="4320000"/>
-          </a:xfrm>
-          <a:prstGeom prst="rect">
-            <a:avLst/>
-          </a:prstGeom>
-        </p:spPr>
-      </p:pic>
-      <p:sp>
-        <p:nvSpPr>
           <p:cNvPr id="12" name="Rectángulo 11">
             <a:extLst>
               <a:ext uri="{FF2B5EF4-FFF2-40B4-BE49-F238E27FC236}">
@@ -4176,7 +4020,7 @@
           <p:nvPr/>
         </p:nvPicPr>
         <p:blipFill>
-          <a:blip r:embed="rId4"/>
+          <a:blip r:embed="rId3"/>
           <a:stretch>
             <a:fillRect/>
           </a:stretch>
@@ -4277,7 +4121,7 @@
                 <a:latin typeface="Arial" panose="020B0604020202020204" pitchFamily="34" charset="0"/>
                 <a:cs typeface="Arial" panose="020B0604020202020204" pitchFamily="34" charset="0"/>
               </a:rPr>
-              <a:t>economy</a:t>
+              <a:t>business</a:t>
             </a:r>
             <a:r>
               <a:rPr lang="es-ES" sz="2800" b="1" dirty="0">
@@ -4378,6 +4222,450 @@
           </a:fontRef>
         </p:style>
       </p:cxnSp>
+      <p:sp>
+        <p:nvSpPr>
+          <p:cNvPr id="5" name="Marcador de contenido 2">
+            <a:extLst>
+              <a:ext uri="{FF2B5EF4-FFF2-40B4-BE49-F238E27FC236}">
+                <a16:creationId xmlns:a16="http://schemas.microsoft.com/office/drawing/2014/main" id="{7775112C-BEF5-3508-F728-6C8D140DA306}"/>
+              </a:ext>
+            </a:extLst>
+          </p:cNvPr>
+          <p:cNvSpPr>
+            <a:spLocks noGrp="1"/>
+          </p:cNvSpPr>
+          <p:nvPr>
+            <p:ph idx="1"/>
+          </p:nvPr>
+        </p:nvSpPr>
+        <p:spPr>
+          <a:xfrm>
+            <a:off x="5510854" y="948030"/>
+            <a:ext cx="3404191" cy="1477328"/>
+          </a:xfrm>
+        </p:spPr>
+        <p:txBody>
+          <a:bodyPr wrap="square">
+            <a:spAutoFit/>
+          </a:bodyPr>
+          <a:lstStyle/>
+          <a:p>
+            <a:pPr>
+              <a:lnSpc>
+                <a:spcPct val="100000"/>
+              </a:lnSpc>
+              <a:spcBef>
+                <a:spcPts val="0"/>
+              </a:spcBef>
+              <a:buClr>
+                <a:srgbClr val="002060"/>
+              </a:buClr>
+              <a:buFont typeface="Wingdings" panose="05000000000000000000" pitchFamily="2" charset="2"/>
+              <a:buChar char="§"/>
+            </a:pPr>
+            <a:r>
+              <a:rPr lang="es-ES" sz="1800" dirty="0"/>
+              <a:t>"</a:t>
+            </a:r>
+            <a:r>
+              <a:rPr lang="es-ES" sz="1800" dirty="0" err="1"/>
+              <a:t>n_estimators</a:t>
+            </a:r>
+            <a:r>
+              <a:rPr lang="es-ES" sz="1800" dirty="0"/>
+              <a:t>": </a:t>
+            </a:r>
+          </a:p>
+          <a:p>
+            <a:pPr>
+              <a:lnSpc>
+                <a:spcPct val="100000"/>
+              </a:lnSpc>
+              <a:spcBef>
+                <a:spcPts val="0"/>
+              </a:spcBef>
+              <a:buClr>
+                <a:srgbClr val="002060"/>
+              </a:buClr>
+              <a:buFont typeface="Wingdings" panose="05000000000000000000" pitchFamily="2" charset="2"/>
+              <a:buChar char="§"/>
+            </a:pPr>
+            <a:r>
+              <a:rPr lang="es-ES" sz="1800" dirty="0"/>
+              <a:t>"</a:t>
+            </a:r>
+            <a:r>
+              <a:rPr lang="es-ES" sz="1800" dirty="0" err="1"/>
+              <a:t>max_depth</a:t>
+            </a:r>
+            <a:r>
+              <a:rPr lang="es-ES" sz="1800" dirty="0"/>
+              <a:t>": 5</a:t>
+            </a:r>
+          </a:p>
+          <a:p>
+            <a:pPr>
+              <a:lnSpc>
+                <a:spcPct val="100000"/>
+              </a:lnSpc>
+              <a:spcBef>
+                <a:spcPts val="0"/>
+              </a:spcBef>
+              <a:buClr>
+                <a:srgbClr val="002060"/>
+              </a:buClr>
+              <a:buFont typeface="Wingdings" panose="05000000000000000000" pitchFamily="2" charset="2"/>
+              <a:buChar char="§"/>
+            </a:pPr>
+            <a:r>
+              <a:rPr lang="es-ES" sz="1800" dirty="0"/>
+              <a:t>"</a:t>
+            </a:r>
+            <a:r>
+              <a:rPr lang="es-ES" sz="1800" dirty="0" err="1"/>
+              <a:t>learning_rate</a:t>
+            </a:r>
+            <a:r>
+              <a:rPr lang="es-ES" sz="1800" dirty="0"/>
+              <a:t>":</a:t>
+            </a:r>
+          </a:p>
+          <a:p>
+            <a:pPr>
+              <a:lnSpc>
+                <a:spcPct val="100000"/>
+              </a:lnSpc>
+              <a:spcBef>
+                <a:spcPts val="0"/>
+              </a:spcBef>
+              <a:buClr>
+                <a:srgbClr val="002060"/>
+              </a:buClr>
+              <a:buFont typeface="Wingdings" panose="05000000000000000000" pitchFamily="2" charset="2"/>
+              <a:buChar char="§"/>
+            </a:pPr>
+            <a:r>
+              <a:rPr lang="es-ES" sz="1800" dirty="0"/>
+              <a:t>"</a:t>
+            </a:r>
+            <a:r>
+              <a:rPr lang="es-ES" sz="1800" dirty="0" err="1"/>
+              <a:t>subsample</a:t>
+            </a:r>
+            <a:r>
+              <a:rPr lang="es-ES" sz="1800" dirty="0"/>
+              <a:t>“:</a:t>
+            </a:r>
+          </a:p>
+          <a:p>
+            <a:pPr>
+              <a:lnSpc>
+                <a:spcPct val="100000"/>
+              </a:lnSpc>
+              <a:spcBef>
+                <a:spcPts val="0"/>
+              </a:spcBef>
+              <a:buClr>
+                <a:srgbClr val="002060"/>
+              </a:buClr>
+              <a:buFont typeface="Wingdings" panose="05000000000000000000" pitchFamily="2" charset="2"/>
+              <a:buChar char="§"/>
+            </a:pPr>
+            <a:r>
+              <a:rPr lang="es-ES" sz="1800" dirty="0"/>
+              <a:t>"</a:t>
+            </a:r>
+            <a:r>
+              <a:rPr lang="es-ES" sz="1800" dirty="0" err="1"/>
+              <a:t>colsample_bytree</a:t>
+            </a:r>
+            <a:r>
+              <a:rPr lang="es-ES" sz="1800" dirty="0"/>
+              <a:t>":</a:t>
+            </a:r>
+          </a:p>
+        </p:txBody>
+      </p:sp>
+      <p:sp>
+        <p:nvSpPr>
+          <p:cNvPr id="6" name="CuadroTexto 5">
+            <a:extLst>
+              <a:ext uri="{FF2B5EF4-FFF2-40B4-BE49-F238E27FC236}">
+                <a16:creationId xmlns:a16="http://schemas.microsoft.com/office/drawing/2014/main" id="{23B385C5-848F-EC90-EF53-7622218EF1DB}"/>
+              </a:ext>
+            </a:extLst>
+          </p:cNvPr>
+          <p:cNvSpPr txBox="1"/>
+          <p:nvPr/>
+        </p:nvSpPr>
+        <p:spPr>
+          <a:xfrm>
+            <a:off x="1010194" y="1377447"/>
+            <a:ext cx="3024390" cy="677108"/>
+          </a:xfrm>
+          <a:prstGeom prst="rect">
+            <a:avLst/>
+          </a:prstGeom>
+          <a:noFill/>
+        </p:spPr>
+        <p:txBody>
+          <a:bodyPr wrap="square">
+            <a:spAutoFit/>
+          </a:bodyPr>
+          <a:lstStyle/>
+          <a:p>
+            <a:pPr marL="342900" indent="-342900">
+              <a:buFont typeface="Wingdings" panose="05000000000000000000" pitchFamily="2" charset="2"/>
+              <a:buChar char="§"/>
+            </a:pPr>
+            <a:r>
+              <a:rPr lang="es-ES" sz="2000" dirty="0">
+                <a:solidFill>
+                  <a:srgbClr val="0070C0"/>
+                </a:solidFill>
+              </a:rPr>
+              <a:t>Optimización bayesiana </a:t>
+            </a:r>
+            <a:br>
+              <a:rPr lang="es-ES" sz="2000" dirty="0">
+                <a:solidFill>
+                  <a:srgbClr val="0070C0"/>
+                </a:solidFill>
+              </a:rPr>
+            </a:br>
+            <a:r>
+              <a:rPr lang="es-ES" sz="1800" dirty="0" err="1"/>
+              <a:t>hiperparámetros</a:t>
+            </a:r>
+            <a:r>
+              <a:rPr lang="es-ES" sz="1800" dirty="0"/>
+              <a:t>:</a:t>
+            </a:r>
+          </a:p>
+        </p:txBody>
+      </p:sp>
+      <p:grpSp>
+        <p:nvGrpSpPr>
+          <p:cNvPr id="7" name="Grupo 6">
+            <a:extLst>
+              <a:ext uri="{FF2B5EF4-FFF2-40B4-BE49-F238E27FC236}">
+                <a16:creationId xmlns:a16="http://schemas.microsoft.com/office/drawing/2014/main" id="{22ED0BCA-CFB7-2BC9-27F5-0A34D5A38278}"/>
+              </a:ext>
+            </a:extLst>
+          </p:cNvPr>
+          <p:cNvGrpSpPr/>
+          <p:nvPr/>
+        </p:nvGrpSpPr>
+        <p:grpSpPr>
+          <a:xfrm>
+            <a:off x="4034584" y="948030"/>
+            <a:ext cx="1476270" cy="1535942"/>
+            <a:chOff x="4034584" y="948030"/>
+            <a:chExt cx="1476270" cy="1535942"/>
+          </a:xfrm>
+        </p:grpSpPr>
+        <p:sp>
+          <p:nvSpPr>
+            <p:cNvPr id="8" name="Abrir llave 7">
+              <a:extLst>
+                <a:ext uri="{FF2B5EF4-FFF2-40B4-BE49-F238E27FC236}">
+                  <a16:creationId xmlns:a16="http://schemas.microsoft.com/office/drawing/2014/main" id="{2847A667-5DFE-387E-83B2-E603B70EA0F9}"/>
+                </a:ext>
+              </a:extLst>
+            </p:cNvPr>
+            <p:cNvSpPr/>
+            <p:nvPr/>
+          </p:nvSpPr>
+          <p:spPr>
+            <a:xfrm>
+              <a:off x="5255664" y="948030"/>
+              <a:ext cx="255190" cy="1535942"/>
+            </a:xfrm>
+            <a:prstGeom prst="leftBrace">
+              <a:avLst/>
+            </a:prstGeom>
+            <a:ln w="19050">
+              <a:solidFill>
+                <a:srgbClr val="0070C0"/>
+              </a:solidFill>
+            </a:ln>
+          </p:spPr>
+          <p:style>
+            <a:lnRef idx="1">
+              <a:schemeClr val="accent1"/>
+            </a:lnRef>
+            <a:fillRef idx="0">
+              <a:schemeClr val="accent1"/>
+            </a:fillRef>
+            <a:effectRef idx="0">
+              <a:schemeClr val="accent1"/>
+            </a:effectRef>
+            <a:fontRef idx="minor">
+              <a:schemeClr val="tx1"/>
+            </a:fontRef>
+          </p:style>
+          <p:txBody>
+            <a:bodyPr rtlCol="0" anchor="ctr"/>
+            <a:lstStyle/>
+            <a:p>
+              <a:pPr algn="ctr"/>
+              <a:endParaRPr lang="es-ES"/>
+            </a:p>
+          </p:txBody>
+        </p:sp>
+        <p:cxnSp>
+          <p:nvCxnSpPr>
+            <p:cNvPr id="10" name="Conector recto de flecha 9">
+              <a:extLst>
+                <a:ext uri="{FF2B5EF4-FFF2-40B4-BE49-F238E27FC236}">
+                  <a16:creationId xmlns:a16="http://schemas.microsoft.com/office/drawing/2014/main" id="{D144D5F1-6CF7-F66E-F1BA-AF277F53C803}"/>
+                </a:ext>
+              </a:extLst>
+            </p:cNvPr>
+            <p:cNvCxnSpPr>
+              <a:cxnSpLocks/>
+              <a:stCxn id="6" idx="3"/>
+              <a:endCxn id="8" idx="1"/>
+            </p:cNvCxnSpPr>
+            <p:nvPr/>
+          </p:nvCxnSpPr>
+          <p:spPr>
+            <a:xfrm>
+              <a:off x="4034584" y="1716001"/>
+              <a:ext cx="1221080" cy="0"/>
+            </a:xfrm>
+            <a:prstGeom prst="straightConnector1">
+              <a:avLst/>
+            </a:prstGeom>
+            <a:ln w="15875">
+              <a:tailEnd type="none"/>
+            </a:ln>
+          </p:spPr>
+          <p:style>
+            <a:lnRef idx="1">
+              <a:schemeClr val="accent1"/>
+            </a:lnRef>
+            <a:fillRef idx="0">
+              <a:schemeClr val="accent1"/>
+            </a:fillRef>
+            <a:effectRef idx="0">
+              <a:schemeClr val="accent1"/>
+            </a:effectRef>
+            <a:fontRef idx="minor">
+              <a:schemeClr val="tx1"/>
+            </a:fontRef>
+          </p:style>
+        </p:cxnSp>
+        <p:cxnSp>
+          <p:nvCxnSpPr>
+            <p:cNvPr id="11" name="Conector recto 10">
+              <a:extLst>
+                <a:ext uri="{FF2B5EF4-FFF2-40B4-BE49-F238E27FC236}">
+                  <a16:creationId xmlns:a16="http://schemas.microsoft.com/office/drawing/2014/main" id="{04A41F0B-838D-7FD8-EEEB-8F025C786712}"/>
+                </a:ext>
+              </a:extLst>
+            </p:cNvPr>
+            <p:cNvCxnSpPr/>
+            <p:nvPr/>
+          </p:nvCxnSpPr>
+          <p:spPr>
+            <a:xfrm>
+              <a:off x="4034584" y="1395919"/>
+              <a:ext cx="0" cy="677108"/>
+            </a:xfrm>
+            <a:prstGeom prst="line">
+              <a:avLst/>
+            </a:prstGeom>
+            <a:ln w="19050"/>
+          </p:spPr>
+          <p:style>
+            <a:lnRef idx="1">
+              <a:schemeClr val="accent1"/>
+            </a:lnRef>
+            <a:fillRef idx="0">
+              <a:schemeClr val="accent1"/>
+            </a:fillRef>
+            <a:effectRef idx="0">
+              <a:schemeClr val="accent1"/>
+            </a:effectRef>
+            <a:fontRef idx="minor">
+              <a:schemeClr val="tx1"/>
+            </a:fontRef>
+          </p:style>
+        </p:cxnSp>
+      </p:grpSp>
+      <p:pic>
+        <p:nvPicPr>
+          <p:cNvPr id="18" name="Imagen 17">
+            <a:extLst>
+              <a:ext uri="{FF2B5EF4-FFF2-40B4-BE49-F238E27FC236}">
+                <a16:creationId xmlns:a16="http://schemas.microsoft.com/office/drawing/2014/main" id="{A41D6373-3FD5-F9B1-A592-79BF8BB0D909}"/>
+              </a:ext>
+            </a:extLst>
+          </p:cNvPr>
+          <p:cNvPicPr>
+            <a:picLocks noChangeAspect="1"/>
+          </p:cNvPicPr>
+          <p:nvPr/>
+        </p:nvPicPr>
+        <p:blipFill>
+          <a:blip r:embed="rId4">
+            <a:extLst>
+              <a:ext uri="{28A0092B-C50C-407E-A947-70E740481C1C}">
+                <a14:useLocalDpi xmlns:a14="http://schemas.microsoft.com/office/drawing/2010/main" val="0"/>
+              </a:ext>
+            </a:extLst>
+          </a:blip>
+          <a:stretch>
+            <a:fillRect/>
+          </a:stretch>
+        </p:blipFill>
+        <p:spPr>
+          <a:xfrm>
+            <a:off x="944000" y="2780516"/>
+            <a:ext cx="4680000" cy="3495190"/>
+          </a:xfrm>
+          <a:prstGeom prst="rect">
+            <a:avLst/>
+          </a:prstGeom>
+        </p:spPr>
+      </p:pic>
+      <p:pic>
+        <p:nvPicPr>
+          <p:cNvPr id="24" name="Imagen 23">
+            <a:extLst>
+              <a:ext uri="{FF2B5EF4-FFF2-40B4-BE49-F238E27FC236}">
+                <a16:creationId xmlns:a16="http://schemas.microsoft.com/office/drawing/2014/main" id="{D6059DFC-F71F-24F6-A637-5AE64E548D78}"/>
+              </a:ext>
+            </a:extLst>
+          </p:cNvPr>
+          <p:cNvPicPr>
+            <a:picLocks noChangeAspect="1"/>
+          </p:cNvPicPr>
+          <p:nvPr/>
+        </p:nvPicPr>
+        <p:blipFill>
+          <a:blip r:embed="rId5">
+            <a:extLst>
+              <a:ext uri="{28A0092B-C50C-407E-A947-70E740481C1C}">
+                <a14:useLocalDpi xmlns:a14="http://schemas.microsoft.com/office/drawing/2010/main" val="0"/>
+              </a:ext>
+            </a:extLst>
+          </a:blip>
+          <a:stretch>
+            <a:fillRect/>
+          </a:stretch>
+        </p:blipFill>
+        <p:spPr>
+          <a:xfrm>
+            <a:off x="6568000" y="2780516"/>
+            <a:ext cx="4680000" cy="3495190"/>
+          </a:xfrm>
+          <a:prstGeom prst="rect">
+            <a:avLst/>
+          </a:prstGeom>
+        </p:spPr>
+      </p:pic>
     </p:spTree>
     <p:extLst>
       <p:ext uri="{BB962C8B-B14F-4D97-AF65-F5344CB8AC3E}">
@@ -5270,7 +5558,47 @@
                 <a:latin typeface="Arial" panose="020B0604020202020204" pitchFamily="34" charset="0"/>
                 <a:cs typeface="Arial" panose="020B0604020202020204" pitchFamily="34" charset="0"/>
               </a:rPr>
-              <a:t>Extra: modelo de clasificación</a:t>
+              <a:t>Extra: modelo de clasificación (</a:t>
+            </a:r>
+            <a:r>
+              <a:rPr lang="es-ES" sz="2800" b="1" dirty="0" err="1">
+                <a:solidFill>
+                  <a:schemeClr val="bg1"/>
+                </a:solidFill>
+                <a:latin typeface="Arial" panose="020B0604020202020204" pitchFamily="34" charset="0"/>
+                <a:cs typeface="Arial" panose="020B0604020202020204" pitchFamily="34" charset="0"/>
+              </a:rPr>
+              <a:t>economy</a:t>
+            </a:r>
+            <a:r>
+              <a:rPr lang="es-ES" sz="2800" b="1" dirty="0">
+                <a:solidFill>
+                  <a:schemeClr val="bg1"/>
+                </a:solidFill>
+                <a:latin typeface="Arial" panose="020B0604020202020204" pitchFamily="34" charset="0"/>
+                <a:cs typeface="Arial" panose="020B0604020202020204" pitchFamily="34" charset="0"/>
+              </a:rPr>
+              <a:t> + </a:t>
+            </a:r>
+            <a:r>
+              <a:rPr lang="es-ES" sz="2800" b="1" dirty="0" err="1">
+                <a:solidFill>
+                  <a:schemeClr val="bg1"/>
+                </a:solidFill>
+                <a:latin typeface="Arial" panose="020B0604020202020204" pitchFamily="34" charset="0"/>
+                <a:cs typeface="Arial" panose="020B0604020202020204" pitchFamily="34" charset="0"/>
+              </a:rPr>
+              <a:t>business</a:t>
+            </a:r>
+            <a:r>
+              <a:rPr lang="es-ES" sz="2800" b="1" dirty="0">
+                <a:solidFill>
+                  <a:schemeClr val="bg1"/>
+                </a:solidFill>
+                <a:latin typeface="Arial" panose="020B0604020202020204" pitchFamily="34" charset="0"/>
+                <a:cs typeface="Arial" panose="020B0604020202020204" pitchFamily="34" charset="0"/>
+              </a:rPr>
+              <a:t>)</a:t>
             </a:r>
           </a:p>
         </p:txBody>
@@ -5334,7 +5662,7 @@
         </p:nvCxnSpPr>
         <p:spPr>
           <a:xfrm>
-            <a:off x="149723" y="6630866"/>
+            <a:off x="860015" y="6572250"/>
             <a:ext cx="11916000" cy="0"/>
           </a:xfrm>
           <a:prstGeom prst="line">
@@ -5361,6 +5689,1620 @@
           </a:fontRef>
         </p:style>
       </p:cxnSp>
+      <p:sp>
+        <p:nvSpPr>
+          <p:cNvPr id="2" name="Marcador de contenido 2">
+            <a:extLst>
+              <a:ext uri="{FF2B5EF4-FFF2-40B4-BE49-F238E27FC236}">
+                <a16:creationId xmlns:a16="http://schemas.microsoft.com/office/drawing/2014/main" id="{0DEE7059-21B2-3E3E-71BB-86A4B850D251}"/>
+              </a:ext>
+            </a:extLst>
+          </p:cNvPr>
+          <p:cNvSpPr txBox="1">
+            <a:spLocks/>
+          </p:cNvSpPr>
+          <p:nvPr/>
+        </p:nvSpPr>
+        <p:spPr>
+          <a:xfrm>
+            <a:off x="8516987" y="1004426"/>
+            <a:ext cx="3404191" cy="1477328"/>
+          </a:xfrm>
+          <a:prstGeom prst="rect">
+            <a:avLst/>
+          </a:prstGeom>
+        </p:spPr>
+        <p:txBody>
+          <a:bodyPr vert="horz" wrap="square" lIns="91440" tIns="45720" rIns="91440" bIns="45720" rtlCol="0">
+            <a:spAutoFit/>
+          </a:bodyPr>
+          <a:lstStyle>
+            <a:lvl1pPr marL="228600" indent="-228600" algn="l" defTabSz="914400" rtl="0" eaLnBrk="1" latinLnBrk="0" hangingPunct="1">
+              <a:lnSpc>
+                <a:spcPct val="90000"/>
+              </a:lnSpc>
+              <a:spcBef>
+                <a:spcPts val="1000"/>
+              </a:spcBef>
+              <a:buFont typeface="Arial" panose="020B0604020202020204" pitchFamily="34" charset="0"/>
+              <a:buChar char="•"/>
+              <a:defRPr sz="2800" kern="1200">
+                <a:solidFill>
+                  <a:schemeClr val="tx1"/>
+                </a:solidFill>
+                <a:latin typeface="+mn-lt"/>
+                <a:ea typeface="+mn-ea"/>
+                <a:cs typeface="+mn-cs"/>
+              </a:defRPr>
+            </a:lvl1pPr>
+            <a:lvl2pPr marL="685800" indent="-228600" algn="l" defTabSz="914400" rtl="0" eaLnBrk="1" latinLnBrk="0" hangingPunct="1">
+              <a:lnSpc>
+                <a:spcPct val="90000"/>
+              </a:lnSpc>
+              <a:spcBef>
+                <a:spcPts val="500"/>
+              </a:spcBef>
+              <a:buFont typeface="Arial" panose="020B0604020202020204" pitchFamily="34" charset="0"/>
+              <a:buChar char="•"/>
+              <a:defRPr sz="2400" kern="1200">
+                <a:solidFill>
+                  <a:schemeClr val="tx1"/>
+                </a:solidFill>
+                <a:latin typeface="+mn-lt"/>
+                <a:ea typeface="+mn-ea"/>
+                <a:cs typeface="+mn-cs"/>
+              </a:defRPr>
+            </a:lvl2pPr>
+            <a:lvl3pPr marL="1143000" indent="-228600" algn="l" defTabSz="914400" rtl="0" eaLnBrk="1" latinLnBrk="0" hangingPunct="1">
+              <a:lnSpc>
+                <a:spcPct val="90000"/>
+              </a:lnSpc>
+              <a:spcBef>
+                <a:spcPts val="500"/>
+              </a:spcBef>
+              <a:buFont typeface="Arial" panose="020B0604020202020204" pitchFamily="34" charset="0"/>
+              <a:buChar char="•"/>
+              <a:defRPr sz="2000" kern="1200">
+                <a:solidFill>
+                  <a:schemeClr val="tx1"/>
+                </a:solidFill>
+                <a:latin typeface="+mn-lt"/>
+                <a:ea typeface="+mn-ea"/>
+                <a:cs typeface="+mn-cs"/>
+              </a:defRPr>
+            </a:lvl3pPr>
+            <a:lvl4pPr marL="1600200" indent="-228600" algn="l" defTabSz="914400" rtl="0" eaLnBrk="1" latinLnBrk="0" hangingPunct="1">
+              <a:lnSpc>
+                <a:spcPct val="90000"/>
+              </a:lnSpc>
+              <a:spcBef>
+                <a:spcPts val="500"/>
+              </a:spcBef>
+              <a:buFont typeface="Arial" panose="020B0604020202020204" pitchFamily="34" charset="0"/>
+              <a:buChar char="•"/>
+              <a:defRPr sz="1800" kern="1200">
+                <a:solidFill>
+                  <a:schemeClr val="tx1"/>
+                </a:solidFill>
+                <a:latin typeface="+mn-lt"/>
+                <a:ea typeface="+mn-ea"/>
+                <a:cs typeface="+mn-cs"/>
+              </a:defRPr>
+            </a:lvl4pPr>
+            <a:lvl5pPr marL="2057400" indent="-228600" algn="l" defTabSz="914400" rtl="0" eaLnBrk="1" latinLnBrk="0" hangingPunct="1">
+              <a:lnSpc>
+                <a:spcPct val="90000"/>
+              </a:lnSpc>
+              <a:spcBef>
+                <a:spcPts val="500"/>
+              </a:spcBef>
+              <a:buFont typeface="Arial" panose="020B0604020202020204" pitchFamily="34" charset="0"/>
+              <a:buChar char="•"/>
+              <a:defRPr sz="1800" kern="1200">
+                <a:solidFill>
+                  <a:schemeClr val="tx1"/>
+                </a:solidFill>
+                <a:latin typeface="+mn-lt"/>
+                <a:ea typeface="+mn-ea"/>
+                <a:cs typeface="+mn-cs"/>
+              </a:defRPr>
+            </a:lvl5pPr>
+            <a:lvl6pPr marL="2514600" indent="-228600" algn="l" defTabSz="914400" rtl="0" eaLnBrk="1" latinLnBrk="0" hangingPunct="1">
+              <a:lnSpc>
+                <a:spcPct val="90000"/>
+              </a:lnSpc>
+              <a:spcBef>
+                <a:spcPts val="500"/>
+              </a:spcBef>
+              <a:buFont typeface="Arial" panose="020B0604020202020204" pitchFamily="34" charset="0"/>
+              <a:buChar char="•"/>
+              <a:defRPr sz="1800" kern="1200">
+                <a:solidFill>
+                  <a:schemeClr val="tx1"/>
+                </a:solidFill>
+                <a:latin typeface="+mn-lt"/>
+                <a:ea typeface="+mn-ea"/>
+                <a:cs typeface="+mn-cs"/>
+              </a:defRPr>
+            </a:lvl6pPr>
+            <a:lvl7pPr marL="2971800" indent="-228600" algn="l" defTabSz="914400" rtl="0" eaLnBrk="1" latinLnBrk="0" hangingPunct="1">
+              <a:lnSpc>
+                <a:spcPct val="90000"/>
+              </a:lnSpc>
+              <a:spcBef>
+                <a:spcPts val="500"/>
+              </a:spcBef>
+              <a:buFont typeface="Arial" panose="020B0604020202020204" pitchFamily="34" charset="0"/>
+              <a:buChar char="•"/>
+              <a:defRPr sz="1800" kern="1200">
+                <a:solidFill>
+                  <a:schemeClr val="tx1"/>
+                </a:solidFill>
+                <a:latin typeface="+mn-lt"/>
+                <a:ea typeface="+mn-ea"/>
+                <a:cs typeface="+mn-cs"/>
+              </a:defRPr>
+            </a:lvl7pPr>
+            <a:lvl8pPr marL="3429000" indent="-228600" algn="l" defTabSz="914400" rtl="0" eaLnBrk="1" latinLnBrk="0" hangingPunct="1">
+              <a:lnSpc>
+                <a:spcPct val="90000"/>
+              </a:lnSpc>
+              <a:spcBef>
+                <a:spcPts val="500"/>
+              </a:spcBef>
+              <a:buFont typeface="Arial" panose="020B0604020202020204" pitchFamily="34" charset="0"/>
+              <a:buChar char="•"/>
+              <a:defRPr sz="1800" kern="1200">
+                <a:solidFill>
+                  <a:schemeClr val="tx1"/>
+                </a:solidFill>
+                <a:latin typeface="+mn-lt"/>
+                <a:ea typeface="+mn-ea"/>
+                <a:cs typeface="+mn-cs"/>
+              </a:defRPr>
+            </a:lvl8pPr>
+            <a:lvl9pPr marL="3886200" indent="-228600" algn="l" defTabSz="914400" rtl="0" eaLnBrk="1" latinLnBrk="0" hangingPunct="1">
+              <a:lnSpc>
+                <a:spcPct val="90000"/>
+              </a:lnSpc>
+              <a:spcBef>
+                <a:spcPts val="500"/>
+              </a:spcBef>
+              <a:buFont typeface="Arial" panose="020B0604020202020204" pitchFamily="34" charset="0"/>
+              <a:buChar char="•"/>
+              <a:defRPr sz="1800" kern="1200">
+                <a:solidFill>
+                  <a:schemeClr val="tx1"/>
+                </a:solidFill>
+                <a:latin typeface="+mn-lt"/>
+                <a:ea typeface="+mn-ea"/>
+                <a:cs typeface="+mn-cs"/>
+              </a:defRPr>
+            </a:lvl9pPr>
+          </a:lstStyle>
+          <a:p>
+            <a:pPr>
+              <a:lnSpc>
+                <a:spcPct val="100000"/>
+              </a:lnSpc>
+              <a:spcBef>
+                <a:spcPts val="0"/>
+              </a:spcBef>
+              <a:buClr>
+                <a:srgbClr val="002060"/>
+              </a:buClr>
+              <a:buFont typeface="Wingdings" panose="05000000000000000000" pitchFamily="2" charset="2"/>
+              <a:buChar char="§"/>
+            </a:pPr>
+            <a:r>
+              <a:rPr lang="es-ES" sz="1800" dirty="0"/>
+              <a:t>"</a:t>
+            </a:r>
+            <a:r>
+              <a:rPr lang="es-ES" sz="1800" dirty="0" err="1"/>
+              <a:t>n_estimators</a:t>
+            </a:r>
+            <a:r>
+              <a:rPr lang="es-ES" sz="1800" dirty="0"/>
+              <a:t>": 741</a:t>
+            </a:r>
+          </a:p>
+          <a:p>
+            <a:pPr>
+              <a:lnSpc>
+                <a:spcPct val="100000"/>
+              </a:lnSpc>
+              <a:spcBef>
+                <a:spcPts val="0"/>
+              </a:spcBef>
+              <a:buClr>
+                <a:srgbClr val="002060"/>
+              </a:buClr>
+              <a:buFont typeface="Wingdings" panose="05000000000000000000" pitchFamily="2" charset="2"/>
+              <a:buChar char="§"/>
+            </a:pPr>
+            <a:r>
+              <a:rPr lang="es-ES" sz="1800" dirty="0"/>
+              <a:t>"</a:t>
+            </a:r>
+            <a:r>
+              <a:rPr lang="es-ES" sz="1800" dirty="0" err="1"/>
+              <a:t>max_depth</a:t>
+            </a:r>
+            <a:r>
+              <a:rPr lang="es-ES" sz="1800" dirty="0"/>
+              <a:t>": 8</a:t>
+            </a:r>
+          </a:p>
+          <a:p>
+            <a:pPr>
+              <a:lnSpc>
+                <a:spcPct val="100000"/>
+              </a:lnSpc>
+              <a:spcBef>
+                <a:spcPts val="0"/>
+              </a:spcBef>
+              <a:buClr>
+                <a:srgbClr val="002060"/>
+              </a:buClr>
+              <a:buFont typeface="Wingdings" panose="05000000000000000000" pitchFamily="2" charset="2"/>
+              <a:buChar char="§"/>
+            </a:pPr>
+            <a:r>
+              <a:rPr lang="es-ES" sz="1800" dirty="0"/>
+              <a:t>"</a:t>
+            </a:r>
+            <a:r>
+              <a:rPr lang="es-ES" sz="1800" dirty="0" err="1"/>
+              <a:t>learning_rate</a:t>
+            </a:r>
+            <a:r>
+              <a:rPr lang="es-ES" sz="1800" dirty="0"/>
+              <a:t>": 0,089</a:t>
+            </a:r>
+          </a:p>
+          <a:p>
+            <a:pPr>
+              <a:lnSpc>
+                <a:spcPct val="100000"/>
+              </a:lnSpc>
+              <a:spcBef>
+                <a:spcPts val="0"/>
+              </a:spcBef>
+              <a:buClr>
+                <a:srgbClr val="002060"/>
+              </a:buClr>
+              <a:buFont typeface="Wingdings" panose="05000000000000000000" pitchFamily="2" charset="2"/>
+              <a:buChar char="§"/>
+            </a:pPr>
+            <a:r>
+              <a:rPr lang="es-ES" sz="1800" dirty="0"/>
+              <a:t>"</a:t>
+            </a:r>
+            <a:r>
+              <a:rPr lang="es-ES" sz="1800" dirty="0" err="1"/>
+              <a:t>subsample</a:t>
+            </a:r>
+            <a:r>
+              <a:rPr lang="es-ES" sz="1800" dirty="0"/>
+              <a:t>": 0,908</a:t>
+            </a:r>
+          </a:p>
+          <a:p>
+            <a:pPr>
+              <a:lnSpc>
+                <a:spcPct val="100000"/>
+              </a:lnSpc>
+              <a:spcBef>
+                <a:spcPts val="0"/>
+              </a:spcBef>
+              <a:buClr>
+                <a:srgbClr val="002060"/>
+              </a:buClr>
+              <a:buFont typeface="Wingdings" panose="05000000000000000000" pitchFamily="2" charset="2"/>
+              <a:buChar char="§"/>
+            </a:pPr>
+            <a:r>
+              <a:rPr lang="es-ES" sz="1800" dirty="0"/>
+              <a:t>"</a:t>
+            </a:r>
+            <a:r>
+              <a:rPr lang="es-ES" sz="1800" dirty="0" err="1"/>
+              <a:t>colsample_bytree</a:t>
+            </a:r>
+            <a:r>
+              <a:rPr lang="es-ES" sz="1800" dirty="0"/>
+              <a:t>": 0,902</a:t>
+            </a:r>
+          </a:p>
+        </p:txBody>
+      </p:sp>
+      <p:sp>
+        <p:nvSpPr>
+          <p:cNvPr id="3" name="CuadroTexto 2">
+            <a:extLst>
+              <a:ext uri="{FF2B5EF4-FFF2-40B4-BE49-F238E27FC236}">
+                <a16:creationId xmlns:a16="http://schemas.microsoft.com/office/drawing/2014/main" id="{E6EC559B-ABB0-58CE-3F28-6C7B128F1420}"/>
+              </a:ext>
+            </a:extLst>
+          </p:cNvPr>
+          <p:cNvSpPr txBox="1"/>
+          <p:nvPr/>
+        </p:nvSpPr>
+        <p:spPr>
+          <a:xfrm>
+            <a:off x="6184563" y="1392835"/>
+            <a:ext cx="1995078" cy="646331"/>
+          </a:xfrm>
+          <a:prstGeom prst="rect">
+            <a:avLst/>
+          </a:prstGeom>
+          <a:noFill/>
+        </p:spPr>
+        <p:txBody>
+          <a:bodyPr wrap="square">
+            <a:spAutoFit/>
+          </a:bodyPr>
+          <a:lstStyle/>
+          <a:p>
+            <a:pPr marL="342900" indent="-342900">
+              <a:buFont typeface="Wingdings" panose="05000000000000000000" pitchFamily="2" charset="2"/>
+              <a:buChar char="§"/>
+            </a:pPr>
+            <a:r>
+              <a:rPr lang="es-ES" sz="2000" dirty="0" err="1">
+                <a:solidFill>
+                  <a:srgbClr val="0070C0"/>
+                </a:solidFill>
+              </a:rPr>
+              <a:t>Optuna</a:t>
+            </a:r>
+            <a:br>
+              <a:rPr lang="es-ES" sz="2000" dirty="0">
+                <a:solidFill>
+                  <a:srgbClr val="0070C0"/>
+                </a:solidFill>
+              </a:rPr>
+            </a:br>
+            <a:r>
+              <a:rPr lang="es-ES" sz="1600" dirty="0" err="1"/>
+              <a:t>Hiperparámetros</a:t>
+            </a:r>
+            <a:r>
+              <a:rPr lang="es-ES" sz="1400" dirty="0"/>
+              <a:t>:</a:t>
+            </a:r>
+            <a:endParaRPr lang="es-ES" sz="1800" dirty="0"/>
+          </a:p>
+        </p:txBody>
+      </p:sp>
+      <p:grpSp>
+        <p:nvGrpSpPr>
+          <p:cNvPr id="4" name="Grupo 3">
+            <a:extLst>
+              <a:ext uri="{FF2B5EF4-FFF2-40B4-BE49-F238E27FC236}">
+                <a16:creationId xmlns:a16="http://schemas.microsoft.com/office/drawing/2014/main" id="{F3D2F7DE-D36F-1346-1148-CEAE1108DFC1}"/>
+              </a:ext>
+            </a:extLst>
+          </p:cNvPr>
+          <p:cNvGrpSpPr/>
+          <p:nvPr/>
+        </p:nvGrpSpPr>
+        <p:grpSpPr>
+          <a:xfrm>
+            <a:off x="8179641" y="948030"/>
+            <a:ext cx="387933" cy="1535942"/>
+            <a:chOff x="5122921" y="948030"/>
+            <a:chExt cx="387933" cy="1535942"/>
+          </a:xfrm>
+        </p:grpSpPr>
+        <p:sp>
+          <p:nvSpPr>
+            <p:cNvPr id="5" name="Abrir llave 4">
+              <a:extLst>
+                <a:ext uri="{FF2B5EF4-FFF2-40B4-BE49-F238E27FC236}">
+                  <a16:creationId xmlns:a16="http://schemas.microsoft.com/office/drawing/2014/main" id="{93E23522-13B1-C3D5-2078-CD348C556EA1}"/>
+                </a:ext>
+              </a:extLst>
+            </p:cNvPr>
+            <p:cNvSpPr/>
+            <p:nvPr/>
+          </p:nvSpPr>
+          <p:spPr>
+            <a:xfrm>
+              <a:off x="5255664" y="948030"/>
+              <a:ext cx="255190" cy="1535942"/>
+            </a:xfrm>
+            <a:prstGeom prst="leftBrace">
+              <a:avLst/>
+            </a:prstGeom>
+            <a:ln w="19050">
+              <a:solidFill>
+                <a:srgbClr val="0070C0"/>
+              </a:solidFill>
+            </a:ln>
+          </p:spPr>
+          <p:style>
+            <a:lnRef idx="1">
+              <a:schemeClr val="accent1"/>
+            </a:lnRef>
+            <a:fillRef idx="0">
+              <a:schemeClr val="accent1"/>
+            </a:fillRef>
+            <a:effectRef idx="0">
+              <a:schemeClr val="accent1"/>
+            </a:effectRef>
+            <a:fontRef idx="minor">
+              <a:schemeClr val="tx1"/>
+            </a:fontRef>
+          </p:style>
+          <p:txBody>
+            <a:bodyPr rtlCol="0" anchor="ctr"/>
+            <a:lstStyle/>
+            <a:p>
+              <a:pPr algn="ctr"/>
+              <a:endParaRPr lang="es-ES"/>
+            </a:p>
+          </p:txBody>
+        </p:sp>
+        <p:cxnSp>
+          <p:nvCxnSpPr>
+            <p:cNvPr id="6" name="Conector recto de flecha 5">
+              <a:extLst>
+                <a:ext uri="{FF2B5EF4-FFF2-40B4-BE49-F238E27FC236}">
+                  <a16:creationId xmlns:a16="http://schemas.microsoft.com/office/drawing/2014/main" id="{2B7FA977-F908-7B19-8BB3-C6B8262D49FC}"/>
+                </a:ext>
+              </a:extLst>
+            </p:cNvPr>
+            <p:cNvCxnSpPr>
+              <a:cxnSpLocks/>
+              <a:stCxn id="3" idx="3"/>
+              <a:endCxn id="5" idx="1"/>
+            </p:cNvCxnSpPr>
+            <p:nvPr/>
+          </p:nvCxnSpPr>
+          <p:spPr>
+            <a:xfrm>
+              <a:off x="5122921" y="1716001"/>
+              <a:ext cx="132743" cy="0"/>
+            </a:xfrm>
+            <a:prstGeom prst="straightConnector1">
+              <a:avLst/>
+            </a:prstGeom>
+            <a:ln w="15875">
+              <a:tailEnd type="none"/>
+            </a:ln>
+          </p:spPr>
+          <p:style>
+            <a:lnRef idx="1">
+              <a:schemeClr val="accent1"/>
+            </a:lnRef>
+            <a:fillRef idx="0">
+              <a:schemeClr val="accent1"/>
+            </a:fillRef>
+            <a:effectRef idx="0">
+              <a:schemeClr val="accent1"/>
+            </a:effectRef>
+            <a:fontRef idx="minor">
+              <a:schemeClr val="tx1"/>
+            </a:fontRef>
+          </p:style>
+        </p:cxnSp>
+      </p:grpSp>
+      <p:pic>
+        <p:nvPicPr>
+          <p:cNvPr id="14" name="Imagen 13">
+            <a:extLst>
+              <a:ext uri="{FF2B5EF4-FFF2-40B4-BE49-F238E27FC236}">
+                <a16:creationId xmlns:a16="http://schemas.microsoft.com/office/drawing/2014/main" id="{78DF380F-AA5F-F703-A78B-D333272A226B}"/>
+              </a:ext>
+            </a:extLst>
+          </p:cNvPr>
+          <p:cNvPicPr>
+            <a:picLocks noChangeAspect="1"/>
+          </p:cNvPicPr>
+          <p:nvPr/>
+        </p:nvPicPr>
+        <p:blipFill>
+          <a:blip r:embed="rId3">
+            <a:extLst>
+              <a:ext uri="{28A0092B-C50C-407E-A947-70E740481C1C}">
+                <a14:useLocalDpi xmlns:a14="http://schemas.microsoft.com/office/drawing/2010/main" val="0"/>
+              </a:ext>
+            </a:extLst>
+          </a:blip>
+          <a:stretch>
+            <a:fillRect/>
+          </a:stretch>
+        </p:blipFill>
+        <p:spPr>
+          <a:xfrm>
+            <a:off x="6309903" y="2712810"/>
+            <a:ext cx="4680000" cy="3628384"/>
+          </a:xfrm>
+          <a:prstGeom prst="rect">
+            <a:avLst/>
+          </a:prstGeom>
+        </p:spPr>
+      </p:pic>
+      <p:graphicFrame>
+        <p:nvGraphicFramePr>
+          <p:cNvPr id="19" name="Tabla 18">
+            <a:extLst>
+              <a:ext uri="{FF2B5EF4-FFF2-40B4-BE49-F238E27FC236}">
+                <a16:creationId xmlns:a16="http://schemas.microsoft.com/office/drawing/2014/main" id="{79FD2744-4B37-402D-25B3-9E7BA2DB0AF1}"/>
+              </a:ext>
+            </a:extLst>
+          </p:cNvPr>
+          <p:cNvGraphicFramePr>
+            <a:graphicFrameLocks noGrp="1"/>
+          </p:cNvGraphicFramePr>
+          <p:nvPr>
+            <p:extLst>
+              <p:ext uri="{D42A27DB-BD31-4B8C-83A1-F6EECF244321}">
+                <p14:modId xmlns:p14="http://schemas.microsoft.com/office/powerpoint/2010/main" val="3907730919"/>
+              </p:ext>
+            </p:extLst>
+          </p:nvPr>
+        </p:nvGraphicFramePr>
+        <p:xfrm>
+          <a:off x="1305240" y="4190555"/>
+          <a:ext cx="3580269" cy="370840"/>
+        </p:xfrm>
+        <a:graphic>
+          <a:graphicData uri="http://schemas.openxmlformats.org/drawingml/2006/table">
+            <a:tbl>
+              <a:tblPr firstRow="1" bandRow="1">
+                <a:tableStyleId>{5940675A-B579-460E-94D1-54222C63F5DA}</a:tableStyleId>
+              </a:tblPr>
+              <a:tblGrid>
+                <a:gridCol w="1193423">
+                  <a:extLst>
+                    <a:ext uri="{9D8B030D-6E8A-4147-A177-3AD203B41FA5}">
+                      <a16:colId xmlns:a16="http://schemas.microsoft.com/office/drawing/2014/main" val="1731540712"/>
+                    </a:ext>
+                  </a:extLst>
+                </a:gridCol>
+                <a:gridCol w="1193423">
+                  <a:extLst>
+                    <a:ext uri="{9D8B030D-6E8A-4147-A177-3AD203B41FA5}">
+                      <a16:colId xmlns:a16="http://schemas.microsoft.com/office/drawing/2014/main" val="677091030"/>
+                    </a:ext>
+                  </a:extLst>
+                </a:gridCol>
+                <a:gridCol w="1193423">
+                  <a:extLst>
+                    <a:ext uri="{9D8B030D-6E8A-4147-A177-3AD203B41FA5}">
+                      <a16:colId xmlns:a16="http://schemas.microsoft.com/office/drawing/2014/main" val="881885022"/>
+                    </a:ext>
+                  </a:extLst>
+                </a:gridCol>
+              </a:tblGrid>
+              <a:tr h="370840">
+                <a:tc>
+                  <a:txBody>
+                    <a:bodyPr/>
+                    <a:lstStyle/>
+                    <a:p>
+                      <a:pPr algn="ctr"/>
+                      <a:r>
+                        <a:rPr lang="es-ES" dirty="0"/>
+                        <a:t>0,41</a:t>
+                      </a:r>
+                    </a:p>
+                  </a:txBody>
+                  <a:tcPr>
+                    <a:lnL w="12700" cmpd="sng">
+                      <a:noFill/>
+                    </a:lnL>
+                    <a:lnR w="12700" cmpd="sng">
+                      <a:noFill/>
+                    </a:lnR>
+                    <a:lnT w="12700" cmpd="sng">
+                      <a:noFill/>
+                    </a:lnT>
+                    <a:lnB w="12700" cmpd="sng">
+                      <a:noFill/>
+                    </a:lnB>
+                    <a:lnTlToBr w="12700" cmpd="sng">
+                      <a:noFill/>
+                      <a:prstDash val="solid"/>
+                    </a:lnTlToBr>
+                    <a:lnBlToTr w="12700" cmpd="sng">
+                      <a:noFill/>
+                      <a:prstDash val="solid"/>
+                    </a:lnBlToTr>
+                  </a:tcPr>
+                </a:tc>
+                <a:tc>
+                  <a:txBody>
+                    <a:bodyPr/>
+                    <a:lstStyle/>
+                    <a:p>
+                      <a:pPr algn="ctr"/>
+                      <a:r>
+                        <a:rPr lang="es-ES" dirty="0"/>
+                        <a:t>0,50</a:t>
+                      </a:r>
+                    </a:p>
+                  </a:txBody>
+                  <a:tcPr>
+                    <a:lnL w="12700" cmpd="sng">
+                      <a:noFill/>
+                    </a:lnL>
+                    <a:lnR w="12700" cmpd="sng">
+                      <a:noFill/>
+                    </a:lnR>
+                    <a:lnT w="12700" cmpd="sng">
+                      <a:noFill/>
+                    </a:lnT>
+                    <a:lnB w="12700" cmpd="sng">
+                      <a:noFill/>
+                    </a:lnB>
+                    <a:lnTlToBr w="12700" cmpd="sng">
+                      <a:noFill/>
+                      <a:prstDash val="solid"/>
+                    </a:lnTlToBr>
+                    <a:lnBlToTr w="12700" cmpd="sng">
+                      <a:noFill/>
+                      <a:prstDash val="solid"/>
+                    </a:lnBlToTr>
+                  </a:tcPr>
+                </a:tc>
+                <a:tc>
+                  <a:txBody>
+                    <a:bodyPr/>
+                    <a:lstStyle/>
+                    <a:p>
+                      <a:pPr algn="ctr"/>
+                      <a:r>
+                        <a:rPr lang="es-ES" dirty="0"/>
+                        <a:t>0,77</a:t>
+                      </a:r>
+                    </a:p>
+                  </a:txBody>
+                  <a:tcPr>
+                    <a:lnL w="12700" cmpd="sng">
+                      <a:noFill/>
+                    </a:lnL>
+                    <a:lnR w="12700" cmpd="sng">
+                      <a:noFill/>
+                    </a:lnR>
+                    <a:lnT w="12700" cmpd="sng">
+                      <a:noFill/>
+                    </a:lnT>
+                    <a:lnB w="12700" cmpd="sng">
+                      <a:noFill/>
+                    </a:lnB>
+                    <a:lnTlToBr w="12700" cmpd="sng">
+                      <a:noFill/>
+                      <a:prstDash val="solid"/>
+                    </a:lnTlToBr>
+                    <a:lnBlToTr w="12700" cmpd="sng">
+                      <a:noFill/>
+                      <a:prstDash val="solid"/>
+                    </a:lnBlToTr>
+                  </a:tcPr>
+                </a:tc>
+                <a:extLst>
+                  <a:ext uri="{0D108BD9-81ED-4DB2-BD59-A6C34878D82A}">
+                    <a16:rowId xmlns:a16="http://schemas.microsoft.com/office/drawing/2014/main" val="1626652318"/>
+                  </a:ext>
+                </a:extLst>
+              </a:tr>
+            </a:tbl>
+          </a:graphicData>
+        </a:graphic>
+      </p:graphicFrame>
+      <p:sp>
+        <p:nvSpPr>
+          <p:cNvPr id="20" name="Rectángulo: esquinas redondeadas 19">
+            <a:extLst>
+              <a:ext uri="{FF2B5EF4-FFF2-40B4-BE49-F238E27FC236}">
+                <a16:creationId xmlns:a16="http://schemas.microsoft.com/office/drawing/2014/main" id="{4861E8F2-12D4-D258-E8B7-D6B8A6957A41}"/>
+              </a:ext>
+            </a:extLst>
+          </p:cNvPr>
+          <p:cNvSpPr/>
+          <p:nvPr/>
+        </p:nvSpPr>
+        <p:spPr>
+          <a:xfrm>
+            <a:off x="1305240" y="3674543"/>
+            <a:ext cx="3580266" cy="468000"/>
+          </a:xfrm>
+          <a:prstGeom prst="roundRect">
+            <a:avLst/>
+          </a:prstGeom>
+          <a:solidFill>
+            <a:srgbClr val="00B050"/>
+          </a:solidFill>
+          <a:ln>
+            <a:noFill/>
+          </a:ln>
+          <a:scene3d>
+            <a:camera prst="orthographicFront"/>
+            <a:lightRig rig="threePt" dir="t"/>
+          </a:scene3d>
+          <a:sp3d>
+            <a:bevelT/>
+          </a:sp3d>
+        </p:spPr>
+        <p:style>
+          <a:lnRef idx="2">
+            <a:schemeClr val="accent1">
+              <a:shade val="15000"/>
+            </a:schemeClr>
+          </a:lnRef>
+          <a:fillRef idx="1">
+            <a:schemeClr val="accent1"/>
+          </a:fillRef>
+          <a:effectRef idx="0">
+            <a:schemeClr val="accent1"/>
+          </a:effectRef>
+          <a:fontRef idx="minor">
+            <a:schemeClr val="lt1"/>
+          </a:fontRef>
+        </p:style>
+        <p:txBody>
+          <a:bodyPr rtlCol="0" anchor="ctr"/>
+          <a:lstStyle/>
+          <a:p>
+            <a:pPr algn="ctr"/>
+            <a:r>
+              <a:rPr lang="es-ES" sz="2200" dirty="0"/>
+              <a:t>M1: </a:t>
+            </a:r>
+            <a:r>
+              <a:rPr lang="es-ES" sz="2200" dirty="0" err="1"/>
+              <a:t>RandomForestClassifier</a:t>
+            </a:r>
+            <a:endParaRPr lang="es-ES" sz="2200" dirty="0"/>
+          </a:p>
+        </p:txBody>
+      </p:sp>
+      <p:sp>
+        <p:nvSpPr>
+          <p:cNvPr id="21" name="Rectángulo: esquinas redondeadas 20">
+            <a:extLst>
+              <a:ext uri="{FF2B5EF4-FFF2-40B4-BE49-F238E27FC236}">
+                <a16:creationId xmlns:a16="http://schemas.microsoft.com/office/drawing/2014/main" id="{A3AB0A21-9BBF-99A1-2D36-98588E413A61}"/>
+              </a:ext>
+            </a:extLst>
+          </p:cNvPr>
+          <p:cNvSpPr/>
+          <p:nvPr/>
+        </p:nvSpPr>
+        <p:spPr>
+          <a:xfrm>
+            <a:off x="1305240" y="4609407"/>
+            <a:ext cx="3580266" cy="468000"/>
+          </a:xfrm>
+          <a:prstGeom prst="roundRect">
+            <a:avLst/>
+          </a:prstGeom>
+          <a:solidFill>
+            <a:schemeClr val="accent2"/>
+          </a:solidFill>
+          <a:ln>
+            <a:noFill/>
+          </a:ln>
+          <a:effectLst>
+            <a:softEdge rad="25400"/>
+          </a:effectLst>
+          <a:scene3d>
+            <a:camera prst="orthographicFront"/>
+            <a:lightRig rig="threePt" dir="t"/>
+          </a:scene3d>
+          <a:sp3d>
+            <a:bevelT/>
+          </a:sp3d>
+        </p:spPr>
+        <p:style>
+          <a:lnRef idx="2">
+            <a:schemeClr val="accent1">
+              <a:shade val="15000"/>
+            </a:schemeClr>
+          </a:lnRef>
+          <a:fillRef idx="1">
+            <a:schemeClr val="accent1"/>
+          </a:fillRef>
+          <a:effectRef idx="0">
+            <a:schemeClr val="accent1"/>
+          </a:effectRef>
+          <a:fontRef idx="minor">
+            <a:schemeClr val="lt1"/>
+          </a:fontRef>
+        </p:style>
+        <p:txBody>
+          <a:bodyPr rtlCol="0" anchor="ctr"/>
+          <a:lstStyle/>
+          <a:p>
+            <a:pPr algn="ctr"/>
+            <a:r>
+              <a:rPr lang="es-ES" sz="2400" dirty="0"/>
+              <a:t>M2: XGB </a:t>
+            </a:r>
+            <a:r>
+              <a:rPr lang="es-ES" sz="2400" dirty="0" err="1"/>
+              <a:t>Classifier</a:t>
+            </a:r>
+            <a:endParaRPr lang="es-ES" sz="2400" dirty="0"/>
+          </a:p>
+        </p:txBody>
+      </p:sp>
+      <p:sp>
+        <p:nvSpPr>
+          <p:cNvPr id="22" name="Rectángulo: esquinas redondeadas 21">
+            <a:extLst>
+              <a:ext uri="{FF2B5EF4-FFF2-40B4-BE49-F238E27FC236}">
+                <a16:creationId xmlns:a16="http://schemas.microsoft.com/office/drawing/2014/main" id="{04CB5928-B0DD-BA3F-AE78-92814B3466F7}"/>
+              </a:ext>
+            </a:extLst>
+          </p:cNvPr>
+          <p:cNvSpPr/>
+          <p:nvPr/>
+        </p:nvSpPr>
+        <p:spPr>
+          <a:xfrm>
+            <a:off x="1305240" y="5544271"/>
+            <a:ext cx="3580266" cy="468000"/>
+          </a:xfrm>
+          <a:prstGeom prst="roundRect">
+            <a:avLst/>
+          </a:prstGeom>
+          <a:solidFill>
+            <a:srgbClr val="0070C0"/>
+          </a:solidFill>
+          <a:ln cap="flat">
+            <a:noFill/>
+            <a:round/>
+          </a:ln>
+          <a:scene3d>
+            <a:camera prst="orthographicFront"/>
+            <a:lightRig rig="threePt" dir="t"/>
+          </a:scene3d>
+          <a:sp3d>
+            <a:bevelT/>
+          </a:sp3d>
+        </p:spPr>
+        <p:style>
+          <a:lnRef idx="2">
+            <a:schemeClr val="accent1">
+              <a:shade val="15000"/>
+            </a:schemeClr>
+          </a:lnRef>
+          <a:fillRef idx="1">
+            <a:schemeClr val="accent1"/>
+          </a:fillRef>
+          <a:effectRef idx="0">
+            <a:schemeClr val="accent1"/>
+          </a:effectRef>
+          <a:fontRef idx="minor">
+            <a:schemeClr val="lt1"/>
+          </a:fontRef>
+        </p:style>
+        <p:txBody>
+          <a:bodyPr rtlCol="0" anchor="ctr"/>
+          <a:lstStyle/>
+          <a:p>
+            <a:pPr algn="ctr"/>
+            <a:r>
+              <a:rPr lang="es-ES" sz="2400" dirty="0"/>
+              <a:t>M3: </a:t>
+            </a:r>
+            <a:r>
+              <a:rPr lang="es-ES" sz="2400" dirty="0" err="1"/>
+              <a:t>LGBMClassifier</a:t>
+            </a:r>
+            <a:endParaRPr lang="es-ES" sz="2400" dirty="0"/>
+          </a:p>
+        </p:txBody>
+      </p:sp>
+      <p:graphicFrame>
+        <p:nvGraphicFramePr>
+          <p:cNvPr id="23" name="Tabla 22">
+            <a:extLst>
+              <a:ext uri="{FF2B5EF4-FFF2-40B4-BE49-F238E27FC236}">
+                <a16:creationId xmlns:a16="http://schemas.microsoft.com/office/drawing/2014/main" id="{35687C34-5239-4C15-51C2-1A3EB0C8E04C}"/>
+              </a:ext>
+            </a:extLst>
+          </p:cNvPr>
+          <p:cNvGraphicFramePr>
+            <a:graphicFrameLocks noGrp="1"/>
+          </p:cNvGraphicFramePr>
+          <p:nvPr>
+            <p:extLst>
+              <p:ext uri="{D42A27DB-BD31-4B8C-83A1-F6EECF244321}">
+                <p14:modId xmlns:p14="http://schemas.microsoft.com/office/powerpoint/2010/main" val="1550099545"/>
+              </p:ext>
+            </p:extLst>
+          </p:nvPr>
+        </p:nvGraphicFramePr>
+        <p:xfrm>
+          <a:off x="1305241" y="2986450"/>
+          <a:ext cx="3580272" cy="640080"/>
+        </p:xfrm>
+        <a:graphic>
+          <a:graphicData uri="http://schemas.openxmlformats.org/drawingml/2006/table">
+            <a:tbl>
+              <a:tblPr firstRow="1" bandRow="1">
+                <a:tableStyleId>{2D5ABB26-0587-4C30-8999-92F81FD0307C}</a:tableStyleId>
+              </a:tblPr>
+              <a:tblGrid>
+                <a:gridCol w="1193424">
+                  <a:extLst>
+                    <a:ext uri="{9D8B030D-6E8A-4147-A177-3AD203B41FA5}">
+                      <a16:colId xmlns:a16="http://schemas.microsoft.com/office/drawing/2014/main" val="1119009849"/>
+                    </a:ext>
+                  </a:extLst>
+                </a:gridCol>
+                <a:gridCol w="1193424">
+                  <a:extLst>
+                    <a:ext uri="{9D8B030D-6E8A-4147-A177-3AD203B41FA5}">
+                      <a16:colId xmlns:a16="http://schemas.microsoft.com/office/drawing/2014/main" val="3689087454"/>
+                    </a:ext>
+                  </a:extLst>
+                </a:gridCol>
+                <a:gridCol w="1193424">
+                  <a:extLst>
+                    <a:ext uri="{9D8B030D-6E8A-4147-A177-3AD203B41FA5}">
+                      <a16:colId xmlns:a16="http://schemas.microsoft.com/office/drawing/2014/main" val="3432147013"/>
+                    </a:ext>
+                  </a:extLst>
+                </a:gridCol>
+              </a:tblGrid>
+              <a:tr h="370840">
+                <a:tc>
+                  <a:txBody>
+                    <a:bodyPr/>
+                    <a:lstStyle/>
+                    <a:p>
+                      <a:pPr algn="ctr"/>
+                      <a:r>
+                        <a:rPr lang="es-ES" b="1" dirty="0">
+                          <a:solidFill>
+                            <a:srgbClr val="002060"/>
+                          </a:solidFill>
+                        </a:rPr>
+                        <a:t>F1-macro*</a:t>
+                      </a:r>
+                    </a:p>
+                  </a:txBody>
+                  <a:tcPr anchor="ctr">
+                    <a:lnT w="12700" cap="flat" cmpd="sng" algn="ctr">
+                      <a:solidFill>
+                        <a:srgbClr val="002060"/>
+                      </a:solidFill>
+                      <a:prstDash val="solid"/>
+                      <a:round/>
+                      <a:headEnd type="none" w="med" len="med"/>
+                      <a:tailEnd type="none" w="med" len="med"/>
+                    </a:lnT>
+                    <a:lnB w="12700" cap="flat" cmpd="sng" algn="ctr">
+                      <a:solidFill>
+                        <a:srgbClr val="002060"/>
+                      </a:solidFill>
+                      <a:prstDash val="solid"/>
+                      <a:round/>
+                      <a:headEnd type="none" w="med" len="med"/>
+                      <a:tailEnd type="none" w="med" len="med"/>
+                    </a:lnB>
+                  </a:tcPr>
+                </a:tc>
+                <a:tc>
+                  <a:txBody>
+                    <a:bodyPr/>
+                    <a:lstStyle/>
+                    <a:p>
+                      <a:pPr algn="ctr"/>
+                      <a:r>
+                        <a:rPr lang="es-ES" b="1" dirty="0" err="1">
+                          <a:solidFill>
+                            <a:srgbClr val="002060"/>
+                          </a:solidFill>
+                        </a:rPr>
+                        <a:t>Balanced</a:t>
+                      </a:r>
+                      <a:br>
+                        <a:rPr lang="es-ES" b="1" dirty="0">
+                          <a:solidFill>
+                            <a:srgbClr val="002060"/>
+                          </a:solidFill>
+                        </a:rPr>
+                      </a:br>
+                      <a:r>
+                        <a:rPr lang="es-ES" b="1" dirty="0" err="1">
+                          <a:solidFill>
+                            <a:srgbClr val="002060"/>
+                          </a:solidFill>
+                        </a:rPr>
+                        <a:t>Accuracy</a:t>
+                      </a:r>
+                      <a:endParaRPr lang="es-ES" b="1" dirty="0">
+                        <a:solidFill>
+                          <a:srgbClr val="002060"/>
+                        </a:solidFill>
+                      </a:endParaRPr>
+                    </a:p>
+                  </a:txBody>
+                  <a:tcPr anchor="ctr">
+                    <a:lnT w="12700" cap="flat" cmpd="sng" algn="ctr">
+                      <a:solidFill>
+                        <a:srgbClr val="002060"/>
+                      </a:solidFill>
+                      <a:prstDash val="solid"/>
+                      <a:round/>
+                      <a:headEnd type="none" w="med" len="med"/>
+                      <a:tailEnd type="none" w="med" len="med"/>
+                    </a:lnT>
+                    <a:lnB w="12700" cap="flat" cmpd="sng" algn="ctr">
+                      <a:solidFill>
+                        <a:srgbClr val="002060"/>
+                      </a:solidFill>
+                      <a:prstDash val="solid"/>
+                      <a:round/>
+                      <a:headEnd type="none" w="med" len="med"/>
+                      <a:tailEnd type="none" w="med" len="med"/>
+                    </a:lnB>
+                  </a:tcPr>
+                </a:tc>
+                <a:tc>
+                  <a:txBody>
+                    <a:bodyPr/>
+                    <a:lstStyle/>
+                    <a:p>
+                      <a:pPr algn="ctr"/>
+                      <a:r>
+                        <a:rPr lang="es-ES" b="1" dirty="0">
+                          <a:solidFill>
+                            <a:srgbClr val="002060"/>
+                          </a:solidFill>
+                        </a:rPr>
+                        <a:t>ROC-AUC</a:t>
+                      </a:r>
+                    </a:p>
+                  </a:txBody>
+                  <a:tcPr anchor="ctr">
+                    <a:lnT w="12700" cap="flat" cmpd="sng" algn="ctr">
+                      <a:solidFill>
+                        <a:srgbClr val="002060"/>
+                      </a:solidFill>
+                      <a:prstDash val="solid"/>
+                      <a:round/>
+                      <a:headEnd type="none" w="med" len="med"/>
+                      <a:tailEnd type="none" w="med" len="med"/>
+                    </a:lnT>
+                    <a:lnB w="12700" cap="flat" cmpd="sng" algn="ctr">
+                      <a:solidFill>
+                        <a:srgbClr val="002060"/>
+                      </a:solidFill>
+                      <a:prstDash val="solid"/>
+                      <a:round/>
+                      <a:headEnd type="none" w="med" len="med"/>
+                      <a:tailEnd type="none" w="med" len="med"/>
+                    </a:lnB>
+                  </a:tcPr>
+                </a:tc>
+                <a:extLst>
+                  <a:ext uri="{0D108BD9-81ED-4DB2-BD59-A6C34878D82A}">
+                    <a16:rowId xmlns:a16="http://schemas.microsoft.com/office/drawing/2014/main" val="1148049414"/>
+                  </a:ext>
+                </a:extLst>
+              </a:tr>
+            </a:tbl>
+          </a:graphicData>
+        </a:graphic>
+      </p:graphicFrame>
+      <p:graphicFrame>
+        <p:nvGraphicFramePr>
+          <p:cNvPr id="24" name="Tabla 23">
+            <a:extLst>
+              <a:ext uri="{FF2B5EF4-FFF2-40B4-BE49-F238E27FC236}">
+                <a16:creationId xmlns:a16="http://schemas.microsoft.com/office/drawing/2014/main" id="{86FAC6CF-8D5E-39A0-3EF1-440D76278A95}"/>
+              </a:ext>
+            </a:extLst>
+          </p:cNvPr>
+          <p:cNvGraphicFramePr>
+            <a:graphicFrameLocks noGrp="1"/>
+          </p:cNvGraphicFramePr>
+          <p:nvPr>
+            <p:extLst>
+              <p:ext uri="{D42A27DB-BD31-4B8C-83A1-F6EECF244321}">
+                <p14:modId xmlns:p14="http://schemas.microsoft.com/office/powerpoint/2010/main" val="2037809673"/>
+              </p:ext>
+            </p:extLst>
+          </p:nvPr>
+        </p:nvGraphicFramePr>
+        <p:xfrm>
+          <a:off x="1305240" y="5125419"/>
+          <a:ext cx="3580269" cy="370840"/>
+        </p:xfrm>
+        <a:graphic>
+          <a:graphicData uri="http://schemas.openxmlformats.org/drawingml/2006/table">
+            <a:tbl>
+              <a:tblPr firstRow="1" bandRow="1">
+                <a:tableStyleId>{5940675A-B579-460E-94D1-54222C63F5DA}</a:tableStyleId>
+              </a:tblPr>
+              <a:tblGrid>
+                <a:gridCol w="1193423">
+                  <a:extLst>
+                    <a:ext uri="{9D8B030D-6E8A-4147-A177-3AD203B41FA5}">
+                      <a16:colId xmlns:a16="http://schemas.microsoft.com/office/drawing/2014/main" val="1731540712"/>
+                    </a:ext>
+                  </a:extLst>
+                </a:gridCol>
+                <a:gridCol w="1193423">
+                  <a:extLst>
+                    <a:ext uri="{9D8B030D-6E8A-4147-A177-3AD203B41FA5}">
+                      <a16:colId xmlns:a16="http://schemas.microsoft.com/office/drawing/2014/main" val="677091030"/>
+                    </a:ext>
+                  </a:extLst>
+                </a:gridCol>
+                <a:gridCol w="1193423">
+                  <a:extLst>
+                    <a:ext uri="{9D8B030D-6E8A-4147-A177-3AD203B41FA5}">
+                      <a16:colId xmlns:a16="http://schemas.microsoft.com/office/drawing/2014/main" val="881885022"/>
+                    </a:ext>
+                  </a:extLst>
+                </a:gridCol>
+              </a:tblGrid>
+              <a:tr h="370840">
+                <a:tc>
+                  <a:txBody>
+                    <a:bodyPr/>
+                    <a:lstStyle/>
+                    <a:p>
+                      <a:pPr algn="ctr"/>
+                      <a:r>
+                        <a:rPr lang="es-ES" dirty="0"/>
+                        <a:t>0,63</a:t>
+                      </a:r>
+                    </a:p>
+                  </a:txBody>
+                  <a:tcPr>
+                    <a:lnL w="12700" cmpd="sng">
+                      <a:noFill/>
+                    </a:lnL>
+                    <a:lnR w="12700" cmpd="sng">
+                      <a:noFill/>
+                    </a:lnR>
+                    <a:lnT w="12700" cmpd="sng">
+                      <a:noFill/>
+                    </a:lnT>
+                    <a:lnB w="12700" cmpd="sng">
+                      <a:noFill/>
+                    </a:lnB>
+                    <a:lnTlToBr w="12700" cmpd="sng">
+                      <a:noFill/>
+                      <a:prstDash val="solid"/>
+                    </a:lnTlToBr>
+                    <a:lnBlToTr w="12700" cmpd="sng">
+                      <a:noFill/>
+                      <a:prstDash val="solid"/>
+                    </a:lnBlToTr>
+                  </a:tcPr>
+                </a:tc>
+                <a:tc>
+                  <a:txBody>
+                    <a:bodyPr/>
+                    <a:lstStyle/>
+                    <a:p>
+                      <a:pPr algn="ctr"/>
+                      <a:r>
+                        <a:rPr lang="es-ES" dirty="0"/>
+                        <a:t>0,62</a:t>
+                      </a:r>
+                    </a:p>
+                  </a:txBody>
+                  <a:tcPr>
+                    <a:lnL w="12700" cmpd="sng">
+                      <a:noFill/>
+                    </a:lnL>
+                    <a:lnR w="12700" cmpd="sng">
+                      <a:noFill/>
+                    </a:lnR>
+                    <a:lnT w="12700" cmpd="sng">
+                      <a:noFill/>
+                    </a:lnT>
+                    <a:lnB w="12700" cmpd="sng">
+                      <a:noFill/>
+                    </a:lnB>
+                    <a:lnTlToBr w="12700" cmpd="sng">
+                      <a:noFill/>
+                      <a:prstDash val="solid"/>
+                    </a:lnTlToBr>
+                    <a:lnBlToTr w="12700" cmpd="sng">
+                      <a:noFill/>
+                      <a:prstDash val="solid"/>
+                    </a:lnBlToTr>
+                  </a:tcPr>
+                </a:tc>
+                <a:tc>
+                  <a:txBody>
+                    <a:bodyPr/>
+                    <a:lstStyle/>
+                    <a:p>
+                      <a:pPr algn="ctr"/>
+                      <a:r>
+                        <a:rPr lang="es-ES" dirty="0"/>
+                        <a:t>0,79</a:t>
+                      </a:r>
+                    </a:p>
+                  </a:txBody>
+                  <a:tcPr>
+                    <a:lnL w="12700" cmpd="sng">
+                      <a:noFill/>
+                    </a:lnL>
+                    <a:lnR w="12700" cmpd="sng">
+                      <a:noFill/>
+                    </a:lnR>
+                    <a:lnT w="12700" cmpd="sng">
+                      <a:noFill/>
+                    </a:lnT>
+                    <a:lnB w="12700" cmpd="sng">
+                      <a:noFill/>
+                    </a:lnB>
+                    <a:lnTlToBr w="12700" cmpd="sng">
+                      <a:noFill/>
+                      <a:prstDash val="solid"/>
+                    </a:lnTlToBr>
+                    <a:lnBlToTr w="12700" cmpd="sng">
+                      <a:noFill/>
+                      <a:prstDash val="solid"/>
+                    </a:lnBlToTr>
+                  </a:tcPr>
+                </a:tc>
+                <a:extLst>
+                  <a:ext uri="{0D108BD9-81ED-4DB2-BD59-A6C34878D82A}">
+                    <a16:rowId xmlns:a16="http://schemas.microsoft.com/office/drawing/2014/main" val="1626652318"/>
+                  </a:ext>
+                </a:extLst>
+              </a:tr>
+            </a:tbl>
+          </a:graphicData>
+        </a:graphic>
+      </p:graphicFrame>
+      <p:graphicFrame>
+        <p:nvGraphicFramePr>
+          <p:cNvPr id="25" name="Tabla 24">
+            <a:extLst>
+              <a:ext uri="{FF2B5EF4-FFF2-40B4-BE49-F238E27FC236}">
+                <a16:creationId xmlns:a16="http://schemas.microsoft.com/office/drawing/2014/main" id="{CE38448C-4D5E-3061-6365-B1017E43F235}"/>
+              </a:ext>
+            </a:extLst>
+          </p:cNvPr>
+          <p:cNvGraphicFramePr>
+            <a:graphicFrameLocks noGrp="1"/>
+          </p:cNvGraphicFramePr>
+          <p:nvPr>
+            <p:extLst>
+              <p:ext uri="{D42A27DB-BD31-4B8C-83A1-F6EECF244321}">
+                <p14:modId xmlns:p14="http://schemas.microsoft.com/office/powerpoint/2010/main" val="609984118"/>
+              </p:ext>
+            </p:extLst>
+          </p:nvPr>
+        </p:nvGraphicFramePr>
+        <p:xfrm>
+          <a:off x="1305240" y="6060285"/>
+          <a:ext cx="3580269" cy="370840"/>
+        </p:xfrm>
+        <a:graphic>
+          <a:graphicData uri="http://schemas.openxmlformats.org/drawingml/2006/table">
+            <a:tbl>
+              <a:tblPr firstRow="1" bandRow="1">
+                <a:tableStyleId>{5940675A-B579-460E-94D1-54222C63F5DA}</a:tableStyleId>
+              </a:tblPr>
+              <a:tblGrid>
+                <a:gridCol w="1193423">
+                  <a:extLst>
+                    <a:ext uri="{9D8B030D-6E8A-4147-A177-3AD203B41FA5}">
+                      <a16:colId xmlns:a16="http://schemas.microsoft.com/office/drawing/2014/main" val="1731540712"/>
+                    </a:ext>
+                  </a:extLst>
+                </a:gridCol>
+                <a:gridCol w="1193423">
+                  <a:extLst>
+                    <a:ext uri="{9D8B030D-6E8A-4147-A177-3AD203B41FA5}">
+                      <a16:colId xmlns:a16="http://schemas.microsoft.com/office/drawing/2014/main" val="677091030"/>
+                    </a:ext>
+                  </a:extLst>
+                </a:gridCol>
+                <a:gridCol w="1193423">
+                  <a:extLst>
+                    <a:ext uri="{9D8B030D-6E8A-4147-A177-3AD203B41FA5}">
+                      <a16:colId xmlns:a16="http://schemas.microsoft.com/office/drawing/2014/main" val="881885022"/>
+                    </a:ext>
+                  </a:extLst>
+                </a:gridCol>
+              </a:tblGrid>
+              <a:tr h="370840">
+                <a:tc>
+                  <a:txBody>
+                    <a:bodyPr/>
+                    <a:lstStyle/>
+                    <a:p>
+                      <a:pPr algn="ctr"/>
+                      <a:r>
+                        <a:rPr lang="es-ES" dirty="0"/>
+                        <a:t>0,61</a:t>
+                      </a:r>
+                    </a:p>
+                  </a:txBody>
+                  <a:tcPr>
+                    <a:lnL w="12700" cmpd="sng">
+                      <a:noFill/>
+                    </a:lnL>
+                    <a:lnR w="12700" cmpd="sng">
+                      <a:noFill/>
+                    </a:lnR>
+                    <a:lnT w="12700" cmpd="sng">
+                      <a:noFill/>
+                    </a:lnT>
+                    <a:lnB w="12700" cap="flat" cmpd="sng" algn="ctr">
+                      <a:solidFill>
+                        <a:srgbClr val="002060"/>
+                      </a:solidFill>
+                      <a:prstDash val="solid"/>
+                      <a:round/>
+                      <a:headEnd type="none" w="med" len="med"/>
+                      <a:tailEnd type="none" w="med" len="med"/>
+                    </a:lnB>
+                    <a:lnTlToBr w="12700" cmpd="sng">
+                      <a:noFill/>
+                      <a:prstDash val="solid"/>
+                    </a:lnTlToBr>
+                    <a:lnBlToTr w="12700" cmpd="sng">
+                      <a:noFill/>
+                      <a:prstDash val="solid"/>
+                    </a:lnBlToTr>
+                  </a:tcPr>
+                </a:tc>
+                <a:tc>
+                  <a:txBody>
+                    <a:bodyPr/>
+                    <a:lstStyle/>
+                    <a:p>
+                      <a:pPr algn="ctr"/>
+                      <a:r>
+                        <a:rPr lang="es-ES" dirty="0"/>
+                        <a:t>0,61</a:t>
+                      </a:r>
+                    </a:p>
+                  </a:txBody>
+                  <a:tcPr>
+                    <a:lnL w="12700" cmpd="sng">
+                      <a:noFill/>
+                    </a:lnL>
+                    <a:lnR w="12700" cmpd="sng">
+                      <a:noFill/>
+                    </a:lnR>
+                    <a:lnT w="12700" cmpd="sng">
+                      <a:noFill/>
+                    </a:lnT>
+                    <a:lnB w="12700" cap="flat" cmpd="sng" algn="ctr">
+                      <a:solidFill>
+                        <a:srgbClr val="002060"/>
+                      </a:solidFill>
+                      <a:prstDash val="solid"/>
+                      <a:round/>
+                      <a:headEnd type="none" w="med" len="med"/>
+                      <a:tailEnd type="none" w="med" len="med"/>
+                    </a:lnB>
+                    <a:lnTlToBr w="12700" cmpd="sng">
+                      <a:noFill/>
+                      <a:prstDash val="solid"/>
+                    </a:lnTlToBr>
+                    <a:lnBlToTr w="12700" cmpd="sng">
+                      <a:noFill/>
+                      <a:prstDash val="solid"/>
+                    </a:lnBlToTr>
+                  </a:tcPr>
+                </a:tc>
+                <a:tc>
+                  <a:txBody>
+                    <a:bodyPr/>
+                    <a:lstStyle/>
+                    <a:p>
+                      <a:pPr algn="ctr"/>
+                      <a:r>
+                        <a:rPr lang="es-ES" dirty="0"/>
+                        <a:t>0,78</a:t>
+                      </a:r>
+                    </a:p>
+                  </a:txBody>
+                  <a:tcPr>
+                    <a:lnL w="12700" cmpd="sng">
+                      <a:noFill/>
+                    </a:lnL>
+                    <a:lnR w="12700" cmpd="sng">
+                      <a:noFill/>
+                    </a:lnR>
+                    <a:lnT w="12700" cmpd="sng">
+                      <a:noFill/>
+                    </a:lnT>
+                    <a:lnB w="12700" cap="flat" cmpd="sng" algn="ctr">
+                      <a:solidFill>
+                        <a:srgbClr val="002060"/>
+                      </a:solidFill>
+                      <a:prstDash val="solid"/>
+                      <a:round/>
+                      <a:headEnd type="none" w="med" len="med"/>
+                      <a:tailEnd type="none" w="med" len="med"/>
+                    </a:lnB>
+                    <a:lnTlToBr w="12700" cmpd="sng">
+                      <a:noFill/>
+                      <a:prstDash val="solid"/>
+                    </a:lnTlToBr>
+                    <a:lnBlToTr w="12700" cmpd="sng">
+                      <a:noFill/>
+                      <a:prstDash val="solid"/>
+                    </a:lnBlToTr>
+                  </a:tcPr>
+                </a:tc>
+                <a:extLst>
+                  <a:ext uri="{0D108BD9-81ED-4DB2-BD59-A6C34878D82A}">
+                    <a16:rowId xmlns:a16="http://schemas.microsoft.com/office/drawing/2014/main" val="1626652318"/>
+                  </a:ext>
+                </a:extLst>
+              </a:tr>
+            </a:tbl>
+          </a:graphicData>
+        </a:graphic>
+      </p:graphicFrame>
+      <p:sp>
+        <p:nvSpPr>
+          <p:cNvPr id="32" name="CuadroTexto 31">
+            <a:extLst>
+              <a:ext uri="{FF2B5EF4-FFF2-40B4-BE49-F238E27FC236}">
+                <a16:creationId xmlns:a16="http://schemas.microsoft.com/office/drawing/2014/main" id="{1B3073E3-4017-EC1F-6ED3-959658D92D57}"/>
+              </a:ext>
+            </a:extLst>
+          </p:cNvPr>
+          <p:cNvSpPr txBox="1"/>
+          <p:nvPr/>
+        </p:nvSpPr>
+        <p:spPr>
+          <a:xfrm>
+            <a:off x="1305240" y="2508531"/>
+            <a:ext cx="3383362" cy="400110"/>
+          </a:xfrm>
+          <a:prstGeom prst="rect">
+            <a:avLst/>
+          </a:prstGeom>
+          <a:noFill/>
+        </p:spPr>
+        <p:txBody>
+          <a:bodyPr wrap="none" rtlCol="0">
+            <a:spAutoFit/>
+          </a:bodyPr>
+          <a:lstStyle/>
+          <a:p>
+            <a:pPr marL="285750" indent="-285750">
+              <a:buFont typeface="Wingdings" panose="05000000000000000000" pitchFamily="2" charset="2"/>
+              <a:buChar char="§"/>
+            </a:pPr>
+            <a:r>
+              <a:rPr lang="es-ES" sz="2000" dirty="0">
+                <a:solidFill>
+                  <a:srgbClr val="00B0F0"/>
+                </a:solidFill>
+              </a:rPr>
+              <a:t>Métricas </a:t>
+            </a:r>
+            <a:r>
+              <a:rPr lang="es-ES" dirty="0"/>
+              <a:t>(Validación cruzada) </a:t>
+            </a:r>
+          </a:p>
+        </p:txBody>
+      </p:sp>
+      <p:sp>
+        <p:nvSpPr>
+          <p:cNvPr id="33" name="CuadroTexto 32">
+            <a:extLst>
+              <a:ext uri="{FF2B5EF4-FFF2-40B4-BE49-F238E27FC236}">
+                <a16:creationId xmlns:a16="http://schemas.microsoft.com/office/drawing/2014/main" id="{CD3E8E32-0B43-ABE3-661C-DB8AD93840E2}"/>
+              </a:ext>
+            </a:extLst>
+          </p:cNvPr>
+          <p:cNvSpPr txBox="1"/>
+          <p:nvPr/>
+        </p:nvSpPr>
+        <p:spPr>
+          <a:xfrm>
+            <a:off x="1328034" y="1019050"/>
+            <a:ext cx="4790157" cy="1231106"/>
+          </a:xfrm>
+          <a:prstGeom prst="rect">
+            <a:avLst/>
+          </a:prstGeom>
+          <a:noFill/>
+        </p:spPr>
+        <p:txBody>
+          <a:bodyPr wrap="none" rtlCol="0">
+            <a:spAutoFit/>
+          </a:bodyPr>
+          <a:lstStyle/>
+          <a:p>
+            <a:pPr marL="285750" indent="-285750">
+              <a:buFont typeface="Wingdings" panose="05000000000000000000" pitchFamily="2" charset="2"/>
+              <a:buChar char="§"/>
+            </a:pPr>
+            <a:r>
+              <a:rPr lang="es-ES" sz="2000" dirty="0">
+                <a:solidFill>
+                  <a:srgbClr val="00B0F0"/>
+                </a:solidFill>
+              </a:rPr>
+              <a:t>Pasos previos </a:t>
+            </a:r>
+            <a:r>
+              <a:rPr lang="es-ES" dirty="0"/>
+              <a:t>a modelado:</a:t>
+            </a:r>
+          </a:p>
+          <a:p>
+            <a:pPr marL="285750" indent="-285750">
+              <a:buFontTx/>
+              <a:buChar char="-"/>
+            </a:pPr>
+            <a:r>
+              <a:rPr lang="es-ES" dirty="0"/>
+              <a:t>ETL: igual</a:t>
+            </a:r>
+          </a:p>
+          <a:p>
+            <a:pPr marL="285750" indent="-285750">
+              <a:buFontTx/>
+              <a:buChar char="-"/>
+            </a:pPr>
+            <a:r>
+              <a:rPr lang="es-ES" dirty="0"/>
+              <a:t>Selección </a:t>
+            </a:r>
+            <a:r>
+              <a:rPr lang="es-ES" dirty="0" err="1"/>
+              <a:t>features</a:t>
+            </a:r>
+            <a:r>
+              <a:rPr lang="es-ES" dirty="0"/>
+              <a:t>: todas excepto “</a:t>
+            </a:r>
+            <a:r>
+              <a:rPr lang="es-ES" dirty="0" err="1"/>
+              <a:t>stop_num</a:t>
+            </a:r>
+            <a:r>
+              <a:rPr lang="es-ES" dirty="0"/>
+              <a:t>”</a:t>
+            </a:r>
+          </a:p>
+          <a:p>
+            <a:pPr marL="285750" indent="-285750">
+              <a:buFontTx/>
+              <a:buChar char="-"/>
+            </a:pPr>
+            <a:r>
+              <a:rPr lang="es-ES" dirty="0"/>
+              <a:t>Procesado </a:t>
+            </a:r>
+            <a:r>
+              <a:rPr lang="es-ES" dirty="0" err="1"/>
+              <a:t>features</a:t>
+            </a:r>
+            <a:r>
+              <a:rPr lang="es-ES" dirty="0"/>
+              <a:t>: </a:t>
+            </a:r>
+            <a:r>
+              <a:rPr lang="es-ES" dirty="0" err="1"/>
+              <a:t>OneHotEncoder</a:t>
+            </a:r>
+            <a:endParaRPr lang="es-ES" dirty="0"/>
+          </a:p>
+        </p:txBody>
+      </p:sp>
     </p:spTree>
     <p:extLst>
       <p:ext uri="{BB962C8B-B14F-4D97-AF65-F5344CB8AC3E}">
@@ -8845,7 +10787,7 @@
           <p:nvPr>
             <p:extLst>
               <p:ext uri="{D42A27DB-BD31-4B8C-83A1-F6EECF244321}">
-                <p14:modId xmlns:p14="http://schemas.microsoft.com/office/powerpoint/2010/main" val="1888333000"/>
+                <p14:modId xmlns:p14="http://schemas.microsoft.com/office/powerpoint/2010/main" val="1616012899"/>
               </p:ext>
             </p:extLst>
           </p:nvPr>
@@ -9247,8 +11189,13 @@
                       <a:pPr algn="ctr"/>
                       <a:r>
                         <a:rPr lang="es-ES" dirty="0"/>
-                        <a:t>0</a:t>
-                      </a:r>
+                        <a:t>2,03 e</a:t>
+                      </a:r>
+                      <a:r>
+                        <a:rPr lang="es-ES" baseline="30000" dirty="0"/>
+                        <a:t>-241</a:t>
+                      </a:r>
+                      <a:endParaRPr lang="es-ES" dirty="0"/>
                     </a:p>
                   </a:txBody>
                   <a:tcPr anchor="ctr">
@@ -9360,11 +11307,11 @@
                       <a:pPr algn="ctr"/>
                       <a:r>
                         <a:rPr lang="es-ES" dirty="0"/>
-                        <a:t>1,65 e</a:t>
+                        <a:t>4,61 e</a:t>
                       </a:r>
                       <a:r>
                         <a:rPr lang="es-ES" baseline="30000" dirty="0"/>
-                        <a:t>-60</a:t>
+                        <a:t>-289</a:t>
                       </a:r>
                     </a:p>
                   </a:txBody>
@@ -10280,6 +12227,87 @@
           </a:fontRef>
         </p:style>
       </p:cxnSp>
+      <p:sp>
+        <p:nvSpPr>
+          <p:cNvPr id="4" name="CuadroTexto 3">
+            <a:extLst>
+              <a:ext uri="{FF2B5EF4-FFF2-40B4-BE49-F238E27FC236}">
+                <a16:creationId xmlns:a16="http://schemas.microsoft.com/office/drawing/2014/main" id="{4E06C8A9-58B5-86CB-B889-F57027739D6B}"/>
+              </a:ext>
+            </a:extLst>
+          </p:cNvPr>
+          <p:cNvSpPr txBox="1"/>
+          <p:nvPr/>
+        </p:nvSpPr>
+        <p:spPr>
+          <a:xfrm>
+            <a:off x="933734" y="5262718"/>
+            <a:ext cx="4095929" cy="830997"/>
+          </a:xfrm>
+          <a:prstGeom prst="rect">
+            <a:avLst/>
+          </a:prstGeom>
+          <a:noFill/>
+        </p:spPr>
+        <p:txBody>
+          <a:bodyPr wrap="none" rtlCol="0">
+            <a:spAutoFit/>
+          </a:bodyPr>
+          <a:lstStyle/>
+          <a:p>
+            <a:r>
+              <a:rPr lang="es-ES" sz="2000" dirty="0">
+                <a:solidFill>
+                  <a:srgbClr val="0070C0"/>
+                </a:solidFill>
+              </a:rPr>
+              <a:t>p-</a:t>
+            </a:r>
+            <a:r>
+              <a:rPr lang="es-ES" sz="2000" dirty="0" err="1">
+                <a:solidFill>
+                  <a:srgbClr val="0070C0"/>
+                </a:solidFill>
+              </a:rPr>
+              <a:t>value</a:t>
+            </a:r>
+            <a:r>
+              <a:rPr lang="es-ES" sz="2000" dirty="0">
+                <a:solidFill>
+                  <a:srgbClr val="0070C0"/>
+                </a:solidFill>
+              </a:rPr>
+              <a:t> &lt; 0,05 y </a:t>
+            </a:r>
+            <a:r>
+              <a:rPr lang="es-ES" sz="2000" dirty="0" err="1">
+                <a:solidFill>
+                  <a:srgbClr val="0070C0"/>
+                </a:solidFill>
+              </a:rPr>
+              <a:t>corr</a:t>
+            </a:r>
+            <a:r>
+              <a:rPr lang="es-ES" sz="2000" dirty="0">
+                <a:solidFill>
+                  <a:srgbClr val="0070C0"/>
+                </a:solidFill>
+              </a:rPr>
+              <a:t>. &gt; 0,2:</a:t>
+            </a:r>
+          </a:p>
+          <a:p>
+            <a:r>
+              <a:rPr lang="es-ES" sz="2800" dirty="0">
+                <a:solidFill>
+                  <a:srgbClr val="002060"/>
+                </a:solidFill>
+              </a:rPr>
+              <a:t>¡Nos quedamos con todas!</a:t>
+            </a:r>
+          </a:p>
+        </p:txBody>
+      </p:sp>
     </p:spTree>
     <p:extLst>
       <p:ext uri="{BB962C8B-B14F-4D97-AF65-F5344CB8AC3E}">
@@ -11821,6 +13849,87 @@
           </a:fontRef>
         </p:style>
       </p:cxnSp>
+      <p:sp>
+        <p:nvSpPr>
+          <p:cNvPr id="3" name="CuadroTexto 2">
+            <a:extLst>
+              <a:ext uri="{FF2B5EF4-FFF2-40B4-BE49-F238E27FC236}">
+                <a16:creationId xmlns:a16="http://schemas.microsoft.com/office/drawing/2014/main" id="{E5729BE4-29B6-AD9F-C694-5DF959E8E6E7}"/>
+              </a:ext>
+            </a:extLst>
+          </p:cNvPr>
+          <p:cNvSpPr txBox="1"/>
+          <p:nvPr/>
+        </p:nvSpPr>
+        <p:spPr>
+          <a:xfrm>
+            <a:off x="933734" y="5262718"/>
+            <a:ext cx="4095929" cy="830997"/>
+          </a:xfrm>
+          <a:prstGeom prst="rect">
+            <a:avLst/>
+          </a:prstGeom>
+          <a:noFill/>
+        </p:spPr>
+        <p:txBody>
+          <a:bodyPr wrap="none" rtlCol="0">
+            <a:spAutoFit/>
+          </a:bodyPr>
+          <a:lstStyle/>
+          <a:p>
+            <a:r>
+              <a:rPr lang="es-ES" sz="2000" dirty="0">
+                <a:solidFill>
+                  <a:srgbClr val="0070C0"/>
+                </a:solidFill>
+              </a:rPr>
+              <a:t>p-</a:t>
+            </a:r>
+            <a:r>
+              <a:rPr lang="es-ES" sz="2000" dirty="0" err="1">
+                <a:solidFill>
+                  <a:srgbClr val="0070C0"/>
+                </a:solidFill>
+              </a:rPr>
+              <a:t>value</a:t>
+            </a:r>
+            <a:r>
+              <a:rPr lang="es-ES" sz="2000" dirty="0">
+                <a:solidFill>
+                  <a:srgbClr val="0070C0"/>
+                </a:solidFill>
+              </a:rPr>
+              <a:t> &lt; 0,05 y </a:t>
+            </a:r>
+            <a:r>
+              <a:rPr lang="es-ES" sz="2000" dirty="0" err="1">
+                <a:solidFill>
+                  <a:srgbClr val="0070C0"/>
+                </a:solidFill>
+              </a:rPr>
+              <a:t>corr</a:t>
+            </a:r>
+            <a:r>
+              <a:rPr lang="es-ES" sz="2000" dirty="0">
+                <a:solidFill>
+                  <a:srgbClr val="0070C0"/>
+                </a:solidFill>
+              </a:rPr>
+              <a:t>. &gt; 0,2:</a:t>
+            </a:r>
+          </a:p>
+          <a:p>
+            <a:r>
+              <a:rPr lang="es-ES" sz="2800" dirty="0">
+                <a:solidFill>
+                  <a:srgbClr val="002060"/>
+                </a:solidFill>
+              </a:rPr>
+              <a:t>¡Nos quedamos con todas!</a:t>
+            </a:r>
+          </a:p>
+        </p:txBody>
+      </p:sp>
     </p:spTree>
     <p:extLst>
       <p:ext uri="{BB962C8B-B14F-4D97-AF65-F5344CB8AC3E}">
@@ -11941,8 +14050,8 @@
         </p:blipFill>
         <p:spPr>
           <a:xfrm>
-            <a:off x="540000" y="2406593"/>
-            <a:ext cx="4604694" cy="784928"/>
+            <a:off x="539999" y="2406592"/>
+            <a:ext cx="4868023" cy="965942"/>
           </a:xfrm>
           <a:prstGeom prst="rect">
             <a:avLst/>
@@ -13907,25 +16016,353 @@
       </p:grpSpPr>
       <p:sp>
         <p:nvSpPr>
-          <p:cNvPr id="3" name="Marcador de contenido 2">
-            <a:extLst>
-              <a:ext uri="{FF2B5EF4-FFF2-40B4-BE49-F238E27FC236}">
-                <a16:creationId xmlns:a16="http://schemas.microsoft.com/office/drawing/2014/main" id="{A9654041-D0CB-6F60-2CA2-529C7C803A20}"/>
-              </a:ext>
-            </a:extLst>
-          </p:cNvPr>
-          <p:cNvSpPr>
-            <a:spLocks noGrp="1"/>
+          <p:cNvPr id="23" name="Marcador de contenido 2">
+            <a:extLst>
+              <a:ext uri="{FF2B5EF4-FFF2-40B4-BE49-F238E27FC236}">
+                <a16:creationId xmlns:a16="http://schemas.microsoft.com/office/drawing/2014/main" id="{EADEB433-E6D6-D345-6877-FE196E11787F}"/>
+              </a:ext>
+            </a:extLst>
+          </p:cNvPr>
+          <p:cNvSpPr txBox="1">
+            <a:spLocks/>
           </p:cNvSpPr>
-          <p:nvPr>
-            <p:ph idx="1"/>
-          </p:nvPr>
+          <p:nvPr/>
         </p:nvSpPr>
         <p:spPr>
           <a:xfrm>
-            <a:off x="625725" y="2555155"/>
-            <a:ext cx="3404191" cy="1851789"/>
+            <a:off x="5529935" y="1004426"/>
+            <a:ext cx="3404191" cy="1477328"/>
           </a:xfrm>
+          <a:prstGeom prst="rect">
+            <a:avLst/>
+          </a:prstGeom>
+        </p:spPr>
+        <p:txBody>
+          <a:bodyPr vert="horz" wrap="square" lIns="91440" tIns="45720" rIns="91440" bIns="45720" rtlCol="0">
+            <a:spAutoFit/>
+          </a:bodyPr>
+          <a:lstStyle>
+            <a:lvl1pPr marL="228600" indent="-228600" algn="l" defTabSz="914400" rtl="0" eaLnBrk="1" latinLnBrk="0" hangingPunct="1">
+              <a:lnSpc>
+                <a:spcPct val="90000"/>
+              </a:lnSpc>
+              <a:spcBef>
+                <a:spcPts val="1000"/>
+              </a:spcBef>
+              <a:buFont typeface="Arial" panose="020B0604020202020204" pitchFamily="34" charset="0"/>
+              <a:buChar char="•"/>
+              <a:defRPr sz="2800" kern="1200">
+                <a:solidFill>
+                  <a:schemeClr val="tx1"/>
+                </a:solidFill>
+                <a:latin typeface="+mn-lt"/>
+                <a:ea typeface="+mn-ea"/>
+                <a:cs typeface="+mn-cs"/>
+              </a:defRPr>
+            </a:lvl1pPr>
+            <a:lvl2pPr marL="685800" indent="-228600" algn="l" defTabSz="914400" rtl="0" eaLnBrk="1" latinLnBrk="0" hangingPunct="1">
+              <a:lnSpc>
+                <a:spcPct val="90000"/>
+              </a:lnSpc>
+              <a:spcBef>
+                <a:spcPts val="500"/>
+              </a:spcBef>
+              <a:buFont typeface="Arial" panose="020B0604020202020204" pitchFamily="34" charset="0"/>
+              <a:buChar char="•"/>
+              <a:defRPr sz="2400" kern="1200">
+                <a:solidFill>
+                  <a:schemeClr val="tx1"/>
+                </a:solidFill>
+                <a:latin typeface="+mn-lt"/>
+                <a:ea typeface="+mn-ea"/>
+                <a:cs typeface="+mn-cs"/>
+              </a:defRPr>
+            </a:lvl2pPr>
+            <a:lvl3pPr marL="1143000" indent="-228600" algn="l" defTabSz="914400" rtl="0" eaLnBrk="1" latinLnBrk="0" hangingPunct="1">
+              <a:lnSpc>
+                <a:spcPct val="90000"/>
+              </a:lnSpc>
+              <a:spcBef>
+                <a:spcPts val="500"/>
+              </a:spcBef>
+              <a:buFont typeface="Arial" panose="020B0604020202020204" pitchFamily="34" charset="0"/>
+              <a:buChar char="•"/>
+              <a:defRPr sz="2000" kern="1200">
+                <a:solidFill>
+                  <a:schemeClr val="tx1"/>
+                </a:solidFill>
+                <a:latin typeface="+mn-lt"/>
+                <a:ea typeface="+mn-ea"/>
+                <a:cs typeface="+mn-cs"/>
+              </a:defRPr>
+            </a:lvl3pPr>
+            <a:lvl4pPr marL="1600200" indent="-228600" algn="l" defTabSz="914400" rtl="0" eaLnBrk="1" latinLnBrk="0" hangingPunct="1">
+              <a:lnSpc>
+                <a:spcPct val="90000"/>
+              </a:lnSpc>
+              <a:spcBef>
+                <a:spcPts val="500"/>
+              </a:spcBef>
+              <a:buFont typeface="Arial" panose="020B0604020202020204" pitchFamily="34" charset="0"/>
+              <a:buChar char="•"/>
+              <a:defRPr sz="1800" kern="1200">
+                <a:solidFill>
+                  <a:schemeClr val="tx1"/>
+                </a:solidFill>
+                <a:latin typeface="+mn-lt"/>
+                <a:ea typeface="+mn-ea"/>
+                <a:cs typeface="+mn-cs"/>
+              </a:defRPr>
+            </a:lvl4pPr>
+            <a:lvl5pPr marL="2057400" indent="-228600" algn="l" defTabSz="914400" rtl="0" eaLnBrk="1" latinLnBrk="0" hangingPunct="1">
+              <a:lnSpc>
+                <a:spcPct val="90000"/>
+              </a:lnSpc>
+              <a:spcBef>
+                <a:spcPts val="500"/>
+              </a:spcBef>
+              <a:buFont typeface="Arial" panose="020B0604020202020204" pitchFamily="34" charset="0"/>
+              <a:buChar char="•"/>
+              <a:defRPr sz="1800" kern="1200">
+                <a:solidFill>
+                  <a:schemeClr val="tx1"/>
+                </a:solidFill>
+                <a:latin typeface="+mn-lt"/>
+                <a:ea typeface="+mn-ea"/>
+                <a:cs typeface="+mn-cs"/>
+              </a:defRPr>
+            </a:lvl5pPr>
+            <a:lvl6pPr marL="2514600" indent="-228600" algn="l" defTabSz="914400" rtl="0" eaLnBrk="1" latinLnBrk="0" hangingPunct="1">
+              <a:lnSpc>
+                <a:spcPct val="90000"/>
+              </a:lnSpc>
+              <a:spcBef>
+                <a:spcPts val="500"/>
+              </a:spcBef>
+              <a:buFont typeface="Arial" panose="020B0604020202020204" pitchFamily="34" charset="0"/>
+              <a:buChar char="•"/>
+              <a:defRPr sz="1800" kern="1200">
+                <a:solidFill>
+                  <a:schemeClr val="tx1"/>
+                </a:solidFill>
+                <a:latin typeface="+mn-lt"/>
+                <a:ea typeface="+mn-ea"/>
+                <a:cs typeface="+mn-cs"/>
+              </a:defRPr>
+            </a:lvl6pPr>
+            <a:lvl7pPr marL="2971800" indent="-228600" algn="l" defTabSz="914400" rtl="0" eaLnBrk="1" latinLnBrk="0" hangingPunct="1">
+              <a:lnSpc>
+                <a:spcPct val="90000"/>
+              </a:lnSpc>
+              <a:spcBef>
+                <a:spcPts val="500"/>
+              </a:spcBef>
+              <a:buFont typeface="Arial" panose="020B0604020202020204" pitchFamily="34" charset="0"/>
+              <a:buChar char="•"/>
+              <a:defRPr sz="1800" kern="1200">
+                <a:solidFill>
+                  <a:schemeClr val="tx1"/>
+                </a:solidFill>
+                <a:latin typeface="+mn-lt"/>
+                <a:ea typeface="+mn-ea"/>
+                <a:cs typeface="+mn-cs"/>
+              </a:defRPr>
+            </a:lvl7pPr>
+            <a:lvl8pPr marL="3429000" indent="-228600" algn="l" defTabSz="914400" rtl="0" eaLnBrk="1" latinLnBrk="0" hangingPunct="1">
+              <a:lnSpc>
+                <a:spcPct val="90000"/>
+              </a:lnSpc>
+              <a:spcBef>
+                <a:spcPts val="500"/>
+              </a:spcBef>
+              <a:buFont typeface="Arial" panose="020B0604020202020204" pitchFamily="34" charset="0"/>
+              <a:buChar char="•"/>
+              <a:defRPr sz="1800" kern="1200">
+                <a:solidFill>
+                  <a:schemeClr val="tx1"/>
+                </a:solidFill>
+                <a:latin typeface="+mn-lt"/>
+                <a:ea typeface="+mn-ea"/>
+                <a:cs typeface="+mn-cs"/>
+              </a:defRPr>
+            </a:lvl8pPr>
+            <a:lvl9pPr marL="3886200" indent="-228600" algn="l" defTabSz="914400" rtl="0" eaLnBrk="1" latinLnBrk="0" hangingPunct="1">
+              <a:lnSpc>
+                <a:spcPct val="90000"/>
+              </a:lnSpc>
+              <a:spcBef>
+                <a:spcPts val="500"/>
+              </a:spcBef>
+              <a:buFont typeface="Arial" panose="020B0604020202020204" pitchFamily="34" charset="0"/>
+              <a:buChar char="•"/>
+              <a:defRPr sz="1800" kern="1200">
+                <a:solidFill>
+                  <a:schemeClr val="tx1"/>
+                </a:solidFill>
+                <a:latin typeface="+mn-lt"/>
+                <a:ea typeface="+mn-ea"/>
+                <a:cs typeface="+mn-cs"/>
+              </a:defRPr>
+            </a:lvl9pPr>
+          </a:lstStyle>
+          <a:p>
+            <a:pPr>
+              <a:lnSpc>
+                <a:spcPct val="100000"/>
+              </a:lnSpc>
+              <a:spcBef>
+                <a:spcPts val="0"/>
+              </a:spcBef>
+              <a:buClr>
+                <a:srgbClr val="002060"/>
+              </a:buClr>
+              <a:buFont typeface="Wingdings" panose="05000000000000000000" pitchFamily="2" charset="2"/>
+              <a:buChar char="§"/>
+            </a:pPr>
+            <a:r>
+              <a:rPr lang="es-ES" sz="1800" dirty="0"/>
+              <a:t>"</a:t>
+            </a:r>
+            <a:r>
+              <a:rPr lang="es-ES" sz="1800" dirty="0" err="1"/>
+              <a:t>n_estimators</a:t>
+            </a:r>
+            <a:r>
+              <a:rPr lang="es-ES" sz="1800" dirty="0"/>
+              <a:t>": 741</a:t>
+            </a:r>
+          </a:p>
+          <a:p>
+            <a:pPr>
+              <a:lnSpc>
+                <a:spcPct val="100000"/>
+              </a:lnSpc>
+              <a:spcBef>
+                <a:spcPts val="0"/>
+              </a:spcBef>
+              <a:buClr>
+                <a:srgbClr val="002060"/>
+              </a:buClr>
+              <a:buFont typeface="Wingdings" panose="05000000000000000000" pitchFamily="2" charset="2"/>
+              <a:buChar char="§"/>
+            </a:pPr>
+            <a:r>
+              <a:rPr lang="es-ES" sz="1800" dirty="0"/>
+              <a:t>"</a:t>
+            </a:r>
+            <a:r>
+              <a:rPr lang="es-ES" sz="1800" dirty="0" err="1"/>
+              <a:t>max_depth</a:t>
+            </a:r>
+            <a:r>
+              <a:rPr lang="es-ES" sz="1800" dirty="0"/>
+              <a:t>": 8</a:t>
+            </a:r>
+          </a:p>
+          <a:p>
+            <a:pPr>
+              <a:lnSpc>
+                <a:spcPct val="100000"/>
+              </a:lnSpc>
+              <a:spcBef>
+                <a:spcPts val="0"/>
+              </a:spcBef>
+              <a:buClr>
+                <a:srgbClr val="002060"/>
+              </a:buClr>
+              <a:buFont typeface="Wingdings" panose="05000000000000000000" pitchFamily="2" charset="2"/>
+              <a:buChar char="§"/>
+            </a:pPr>
+            <a:r>
+              <a:rPr lang="es-ES" sz="1800" dirty="0"/>
+              <a:t>"</a:t>
+            </a:r>
+            <a:r>
+              <a:rPr lang="es-ES" sz="1800" dirty="0" err="1"/>
+              <a:t>learning_rate</a:t>
+            </a:r>
+            <a:r>
+              <a:rPr lang="es-ES" sz="1800" dirty="0"/>
+              <a:t>": 0,089</a:t>
+            </a:r>
+          </a:p>
+          <a:p>
+            <a:pPr>
+              <a:lnSpc>
+                <a:spcPct val="100000"/>
+              </a:lnSpc>
+              <a:spcBef>
+                <a:spcPts val="0"/>
+              </a:spcBef>
+              <a:buClr>
+                <a:srgbClr val="002060"/>
+              </a:buClr>
+              <a:buFont typeface="Wingdings" panose="05000000000000000000" pitchFamily="2" charset="2"/>
+              <a:buChar char="§"/>
+            </a:pPr>
+            <a:r>
+              <a:rPr lang="es-ES" sz="1800" dirty="0"/>
+              <a:t>"</a:t>
+            </a:r>
+            <a:r>
+              <a:rPr lang="es-ES" sz="1800" dirty="0" err="1"/>
+              <a:t>subsample</a:t>
+            </a:r>
+            <a:r>
+              <a:rPr lang="es-ES" sz="1800" dirty="0"/>
+              <a:t>": 0,908</a:t>
+            </a:r>
+          </a:p>
+          <a:p>
+            <a:pPr>
+              <a:lnSpc>
+                <a:spcPct val="100000"/>
+              </a:lnSpc>
+              <a:spcBef>
+                <a:spcPts val="0"/>
+              </a:spcBef>
+              <a:buClr>
+                <a:srgbClr val="002060"/>
+              </a:buClr>
+              <a:buFont typeface="Wingdings" panose="05000000000000000000" pitchFamily="2" charset="2"/>
+              <a:buChar char="§"/>
+            </a:pPr>
+            <a:r>
+              <a:rPr lang="es-ES" sz="1800" dirty="0"/>
+              <a:t>"</a:t>
+            </a:r>
+            <a:r>
+              <a:rPr lang="es-ES" sz="1800" dirty="0" err="1"/>
+              <a:t>colsample_bytree</a:t>
+            </a:r>
+            <a:r>
+              <a:rPr lang="es-ES" sz="1800" dirty="0"/>
+              <a:t>": 0,902</a:t>
+            </a:r>
+          </a:p>
+        </p:txBody>
+      </p:sp>
+      <p:sp>
+        <p:nvSpPr>
+          <p:cNvPr id="24" name="CuadroTexto 23">
+            <a:extLst>
+              <a:ext uri="{FF2B5EF4-FFF2-40B4-BE49-F238E27FC236}">
+                <a16:creationId xmlns:a16="http://schemas.microsoft.com/office/drawing/2014/main" id="{6EC8CA9A-BC3C-E61D-5AFD-8359A9B1B799}"/>
+              </a:ext>
+            </a:extLst>
+          </p:cNvPr>
+          <p:cNvSpPr txBox="1"/>
+          <p:nvPr/>
+        </p:nvSpPr>
+        <p:spPr>
+          <a:xfrm>
+            <a:off x="943999" y="1395919"/>
+            <a:ext cx="3068815" cy="677108"/>
+          </a:xfrm>
+          <a:prstGeom prst="rect">
+            <a:avLst/>
+          </a:prstGeom>
+          <a:noFill/>
         </p:spPr>
         <p:txBody>
           <a:bodyPr wrap="square">
@@ -13933,117 +16370,36 @@
           </a:bodyPr>
           <a:lstStyle/>
           <a:p>
-            <a:pPr>
+            <a:pPr marL="342900" indent="-342900">
               <a:buFont typeface="Wingdings" panose="05000000000000000000" pitchFamily="2" charset="2"/>
               <a:buChar char="§"/>
             </a:pPr>
             <a:r>
+              <a:rPr lang="es-ES" sz="2000" dirty="0">
+                <a:solidFill>
+                  <a:srgbClr val="0070C0"/>
+                </a:solidFill>
+              </a:rPr>
+              <a:t>Optimización bayesiana </a:t>
+            </a:r>
+            <a:br>
+              <a:rPr lang="es-ES" sz="2000" dirty="0">
+                <a:solidFill>
+                  <a:srgbClr val="0070C0"/>
+                </a:solidFill>
+              </a:rPr>
+            </a:br>
+            <a:r>
               <a:rPr lang="es-ES" sz="1800" dirty="0" err="1"/>
-              <a:t>n_estimators</a:t>
+              <a:t>hiperparámetros</a:t>
             </a:r>
             <a:r>
               <a:rPr lang="es-ES" sz="1800" dirty="0"/>
-              <a:t>":       </a:t>
-            </a:r>
-          </a:p>
-          <a:p>
-            <a:pPr>
-              <a:buFont typeface="Wingdings" panose="05000000000000000000" pitchFamily="2" charset="2"/>
-              <a:buChar char="§"/>
-            </a:pPr>
-            <a:r>
-              <a:rPr lang="es-ES" sz="1800" dirty="0" err="1"/>
-              <a:t>max_depth</a:t>
-            </a:r>
-            <a:r>
-              <a:rPr lang="es-ES" sz="1800" dirty="0"/>
-              <a:t>":</a:t>
-            </a:r>
-          </a:p>
-          <a:p>
-            <a:pPr>
-              <a:buFont typeface="Wingdings" panose="05000000000000000000" pitchFamily="2" charset="2"/>
-              <a:buChar char="§"/>
-            </a:pPr>
-            <a:r>
-              <a:rPr lang="es-ES" sz="1800" dirty="0" err="1"/>
-              <a:t>learning_rate</a:t>
-            </a:r>
-            <a:r>
-              <a:rPr lang="es-ES" sz="1800" dirty="0"/>
-              <a:t>":       </a:t>
-            </a:r>
-          </a:p>
-          <a:p>
-            <a:pPr>
-              <a:buFont typeface="Wingdings" panose="05000000000000000000" pitchFamily="2" charset="2"/>
-              <a:buChar char="§"/>
-            </a:pPr>
-            <a:r>
-              <a:rPr lang="es-ES" sz="1800" dirty="0"/>
-              <a:t> </a:t>
-            </a:r>
-            <a:r>
-              <a:rPr lang="es-ES" sz="1800" dirty="0" err="1"/>
-              <a:t>subsample</a:t>
-            </a:r>
-            <a:r>
-              <a:rPr lang="es-ES" sz="1800" dirty="0"/>
-              <a:t>":       </a:t>
-            </a:r>
-          </a:p>
-          <a:p>
-            <a:pPr>
-              <a:buFont typeface="Wingdings" panose="05000000000000000000" pitchFamily="2" charset="2"/>
-              <a:buChar char="§"/>
-            </a:pPr>
-            <a:r>
-              <a:rPr lang="es-ES" sz="1800" dirty="0" err="1"/>
-              <a:t>colsample_bytree</a:t>
-            </a:r>
-            <a:r>
-              <a:rPr lang="es-ES" sz="1800" dirty="0"/>
-              <a:t>":</a:t>
+              <a:t>:</a:t>
             </a:r>
           </a:p>
         </p:txBody>
       </p:sp>
-      <p:pic>
-        <p:nvPicPr>
-          <p:cNvPr id="8" name="Imagen 7">
-            <a:extLst>
-              <a:ext uri="{FF2B5EF4-FFF2-40B4-BE49-F238E27FC236}">
-                <a16:creationId xmlns:a16="http://schemas.microsoft.com/office/drawing/2014/main" id="{E14FA269-67EE-6DF6-D071-49DAC0457010}"/>
-              </a:ext>
-            </a:extLst>
-          </p:cNvPr>
-          <p:cNvPicPr>
-            <a:picLocks noChangeAspect="1"/>
-          </p:cNvPicPr>
-          <p:nvPr/>
-        </p:nvPicPr>
-        <p:blipFill>
-          <a:blip r:embed="rId3">
-            <a:extLst>
-              <a:ext uri="{28A0092B-C50C-407E-A947-70E740481C1C}">
-                <a14:useLocalDpi xmlns:a14="http://schemas.microsoft.com/office/drawing/2010/main" val="0"/>
-              </a:ext>
-            </a:extLst>
-          </a:blip>
-          <a:stretch>
-            <a:fillRect/>
-          </a:stretch>
-        </p:blipFill>
-        <p:spPr>
-          <a:xfrm>
-            <a:off x="4446796" y="1893747"/>
-            <a:ext cx="4314532" cy="4320000"/>
-          </a:xfrm>
-          <a:prstGeom prst="rect">
-            <a:avLst/>
-          </a:prstGeom>
-        </p:spPr>
-      </p:pic>
       <p:sp>
         <p:nvSpPr>
           <p:cNvPr id="11" name="Rectángulo 10">
@@ -14111,7 +16467,7 @@
           <p:nvPr/>
         </p:nvPicPr>
         <p:blipFill>
-          <a:blip r:embed="rId4"/>
+          <a:blip r:embed="rId3"/>
           <a:stretch>
             <a:fillRect/>
           </a:stretch>
@@ -14313,67 +16669,226 @@
           </a:fontRef>
         </p:style>
       </p:cxnSp>
-      <p:sp>
-        <p:nvSpPr>
-          <p:cNvPr id="17" name="CuadroTexto 16">
-            <a:extLst>
-              <a:ext uri="{FF2B5EF4-FFF2-40B4-BE49-F238E27FC236}">
-                <a16:creationId xmlns:a16="http://schemas.microsoft.com/office/drawing/2014/main" id="{14AB5A6E-683A-037D-A07B-048BDCD8253F}"/>
-              </a:ext>
-            </a:extLst>
-          </p:cNvPr>
-          <p:cNvSpPr txBox="1"/>
+      <p:pic>
+        <p:nvPicPr>
+          <p:cNvPr id="4" name="Imagen 3">
+            <a:extLst>
+              <a:ext uri="{FF2B5EF4-FFF2-40B4-BE49-F238E27FC236}">
+                <a16:creationId xmlns:a16="http://schemas.microsoft.com/office/drawing/2014/main" id="{B6F975E9-6C39-5CD8-91FD-2E306099EB81}"/>
+              </a:ext>
+            </a:extLst>
+          </p:cNvPr>
+          <p:cNvPicPr>
+            <a:picLocks noChangeAspect="1"/>
+          </p:cNvPicPr>
           <p:nvPr/>
-        </p:nvSpPr>
+        </p:nvPicPr>
+        <p:blipFill>
+          <a:blip r:embed="rId4">
+            <a:extLst>
+              <a:ext uri="{28A0092B-C50C-407E-A947-70E740481C1C}">
+                <a14:useLocalDpi xmlns:a14="http://schemas.microsoft.com/office/drawing/2010/main" val="0"/>
+              </a:ext>
+            </a:extLst>
+          </a:blip>
+          <a:stretch>
+            <a:fillRect/>
+          </a:stretch>
+        </p:blipFill>
         <p:spPr>
           <a:xfrm>
-            <a:off x="569416" y="1305410"/>
-            <a:ext cx="3877380" cy="677108"/>
+            <a:off x="944000" y="2765412"/>
+            <a:ext cx="4680000" cy="3495190"/>
           </a:xfrm>
           <a:prstGeom prst="rect">
             <a:avLst/>
           </a:prstGeom>
-          <a:noFill/>
         </p:spPr>
-        <p:txBody>
-          <a:bodyPr wrap="square">
-            <a:spAutoFit/>
-          </a:bodyPr>
-          <a:lstStyle/>
-          <a:p>
-            <a:pPr marL="0" indent="0">
-              <a:buNone/>
-            </a:pPr>
-            <a:r>
-              <a:rPr lang="es-ES" sz="2000" dirty="0">
-                <a:solidFill>
-                  <a:srgbClr val="0070C0"/>
-                </a:solidFill>
-              </a:rPr>
-              <a:t>Optimización bayesiana </a:t>
-            </a:r>
-            <a:br>
-              <a:rPr lang="es-ES" sz="2000" dirty="0">
-                <a:solidFill>
-                  <a:srgbClr val="0070C0"/>
-                </a:solidFill>
-              </a:rPr>
-            </a:br>
-            <a:r>
-              <a:rPr lang="es-ES" sz="1800" dirty="0"/>
-              <a:t>con los siguientes </a:t>
-            </a:r>
-            <a:r>
-              <a:rPr lang="es-ES" sz="1800" dirty="0" err="1"/>
-              <a:t>hiperparámetros</a:t>
-            </a:r>
-            <a:r>
-              <a:rPr lang="es-ES" sz="1800" dirty="0"/>
-              <a:t>:</a:t>
-            </a:r>
-          </a:p>
-        </p:txBody>
-      </p:sp>
+      </p:pic>
+      <p:pic>
+        <p:nvPicPr>
+          <p:cNvPr id="6" name="Imagen 5">
+            <a:extLst>
+              <a:ext uri="{FF2B5EF4-FFF2-40B4-BE49-F238E27FC236}">
+                <a16:creationId xmlns:a16="http://schemas.microsoft.com/office/drawing/2014/main" id="{A77D1F35-5455-4AF2-33E0-959B45C0FFDD}"/>
+              </a:ext>
+            </a:extLst>
+          </p:cNvPr>
+          <p:cNvPicPr>
+            <a:picLocks noChangeAspect="1"/>
+          </p:cNvPicPr>
+          <p:nvPr/>
+        </p:nvPicPr>
+        <p:blipFill>
+          <a:blip r:embed="rId5">
+            <a:extLst>
+              <a:ext uri="{28A0092B-C50C-407E-A947-70E740481C1C}">
+                <a14:useLocalDpi xmlns:a14="http://schemas.microsoft.com/office/drawing/2010/main" val="0"/>
+              </a:ext>
+            </a:extLst>
+          </a:blip>
+          <a:stretch>
+            <a:fillRect/>
+          </a:stretch>
+        </p:blipFill>
+        <p:spPr>
+          <a:xfrm>
+            <a:off x="6568000" y="2760982"/>
+            <a:ext cx="4680000" cy="3499620"/>
+          </a:xfrm>
+          <a:prstGeom prst="rect">
+            <a:avLst/>
+          </a:prstGeom>
+        </p:spPr>
+      </p:pic>
+      <p:grpSp>
+        <p:nvGrpSpPr>
+          <p:cNvPr id="31" name="Grupo 30">
+            <a:extLst>
+              <a:ext uri="{FF2B5EF4-FFF2-40B4-BE49-F238E27FC236}">
+                <a16:creationId xmlns:a16="http://schemas.microsoft.com/office/drawing/2014/main" id="{4CAD8130-ACBD-5C45-1E0A-524D0339313E}"/>
+              </a:ext>
+            </a:extLst>
+          </p:cNvPr>
+          <p:cNvGrpSpPr/>
+          <p:nvPr/>
+        </p:nvGrpSpPr>
+        <p:grpSpPr>
+          <a:xfrm>
+            <a:off x="4034584" y="948030"/>
+            <a:ext cx="1476270" cy="1535942"/>
+            <a:chOff x="4034584" y="948030"/>
+            <a:chExt cx="1476270" cy="1535942"/>
+          </a:xfrm>
+        </p:grpSpPr>
+        <p:sp>
+          <p:nvSpPr>
+            <p:cNvPr id="32" name="Abrir llave 31">
+              <a:extLst>
+                <a:ext uri="{FF2B5EF4-FFF2-40B4-BE49-F238E27FC236}">
+                  <a16:creationId xmlns:a16="http://schemas.microsoft.com/office/drawing/2014/main" id="{395AE722-3A52-0DD8-093F-42DEC313509A}"/>
+                </a:ext>
+              </a:extLst>
+            </p:cNvPr>
+            <p:cNvSpPr/>
+            <p:nvPr/>
+          </p:nvSpPr>
+          <p:spPr>
+            <a:xfrm>
+              <a:off x="5255664" y="948030"/>
+              <a:ext cx="255190" cy="1535942"/>
+            </a:xfrm>
+            <a:prstGeom prst="leftBrace">
+              <a:avLst/>
+            </a:prstGeom>
+            <a:ln w="19050">
+              <a:solidFill>
+                <a:srgbClr val="0070C0"/>
+              </a:solidFill>
+            </a:ln>
+          </p:spPr>
+          <p:style>
+            <a:lnRef idx="1">
+              <a:schemeClr val="accent1"/>
+            </a:lnRef>
+            <a:fillRef idx="0">
+              <a:schemeClr val="accent1"/>
+            </a:fillRef>
+            <a:effectRef idx="0">
+              <a:schemeClr val="accent1"/>
+            </a:effectRef>
+            <a:fontRef idx="minor">
+              <a:schemeClr val="tx1"/>
+            </a:fontRef>
+          </p:style>
+          <p:txBody>
+            <a:bodyPr rtlCol="0" anchor="ctr"/>
+            <a:lstStyle/>
+            <a:p>
+              <a:pPr algn="ctr"/>
+              <a:endParaRPr lang="es-ES"/>
+            </a:p>
+          </p:txBody>
+        </p:sp>
+        <p:cxnSp>
+          <p:nvCxnSpPr>
+            <p:cNvPr id="33" name="Conector recto de flecha 32">
+              <a:extLst>
+                <a:ext uri="{FF2B5EF4-FFF2-40B4-BE49-F238E27FC236}">
+                  <a16:creationId xmlns:a16="http://schemas.microsoft.com/office/drawing/2014/main" id="{729F5CC2-8B70-D77D-F313-7B80C7F5ECF9}"/>
+                </a:ext>
+              </a:extLst>
+            </p:cNvPr>
+            <p:cNvCxnSpPr>
+              <a:endCxn id="32" idx="1"/>
+            </p:cNvCxnSpPr>
+            <p:nvPr/>
+          </p:nvCxnSpPr>
+          <p:spPr>
+            <a:xfrm>
+              <a:off x="4034584" y="1716001"/>
+              <a:ext cx="1221080" cy="0"/>
+            </a:xfrm>
+            <a:prstGeom prst="straightConnector1">
+              <a:avLst/>
+            </a:prstGeom>
+            <a:ln w="19050">
+              <a:tailEnd type="none"/>
+            </a:ln>
+          </p:spPr>
+          <p:style>
+            <a:lnRef idx="1">
+              <a:schemeClr val="accent1"/>
+            </a:lnRef>
+            <a:fillRef idx="0">
+              <a:schemeClr val="accent1"/>
+            </a:fillRef>
+            <a:effectRef idx="0">
+              <a:schemeClr val="accent1"/>
+            </a:effectRef>
+            <a:fontRef idx="minor">
+              <a:schemeClr val="tx1"/>
+            </a:fontRef>
+          </p:style>
+        </p:cxnSp>
+        <p:cxnSp>
+          <p:nvCxnSpPr>
+            <p:cNvPr id="34" name="Conector recto 33">
+              <a:extLst>
+                <a:ext uri="{FF2B5EF4-FFF2-40B4-BE49-F238E27FC236}">
+                  <a16:creationId xmlns:a16="http://schemas.microsoft.com/office/drawing/2014/main" id="{02CC2307-51EE-28CA-64F5-C006D24A6024}"/>
+                </a:ext>
+              </a:extLst>
+            </p:cNvPr>
+            <p:cNvCxnSpPr/>
+            <p:nvPr/>
+          </p:nvCxnSpPr>
+          <p:spPr>
+            <a:xfrm>
+              <a:off x="4034584" y="1395919"/>
+              <a:ext cx="0" cy="677108"/>
+            </a:xfrm>
+            <a:prstGeom prst="line">
+              <a:avLst/>
+            </a:prstGeom>
+            <a:ln w="19050"/>
+          </p:spPr>
+          <p:style>
+            <a:lnRef idx="1">
+              <a:schemeClr val="accent1"/>
+            </a:lnRef>
+            <a:fillRef idx="0">
+              <a:schemeClr val="accent1"/>
+            </a:fillRef>
+            <a:effectRef idx="0">
+              <a:schemeClr val="accent1"/>
+            </a:effectRef>
+            <a:fontRef idx="minor">
+              <a:schemeClr val="tx1"/>
+            </a:fontRef>
+          </p:style>
+        </p:cxnSp>
+      </p:grpSp>
     </p:spTree>
     <p:extLst>
       <p:ext uri="{BB962C8B-B14F-4D97-AF65-F5344CB8AC3E}">
